--- a/en/slides/21-Computer_Architecture-Input_Output.pptx
+++ b/en/slides/21-Computer_Architecture-Input_Output.pptx
@@ -126,13 +126,13 @@
   <p:extLst>
     <p:ext uri="{521415D9-36F7-43E2-AB2F-B90AF26B5E84}">
       <p14:sectionLst xmlns:p14="http://schemas.microsoft.com/office/powerpoint/2010/main">
-        <p14:section name="Opening" id="{6a1185b6-8fae-3be7-230b-de6ab9171f01}">
+        <p14:section name="Opening" id="{68b35ebe-9a3c-2762-35d6-6d393ed1bfe6}">
           <p14:sldIdLst>
             <p14:sldId id="256"/>
             <p14:sldId id="257"/>
           </p14:sldIdLst>
         </p14:section>
-        <p14:section name="Displays" id="{779b8e20-5203-c69d-b89c-abfd1cccbc38}">
+        <p14:section name="Displays" id="{88487962-9b38-c7fe-5104-287bfbdce873}">
           <p14:sldIdLst>
             <p14:sldId id="258"/>
             <p14:sldId id="259"/>
@@ -142,7 +142,7 @@
             <p14:sldId id="263"/>
           </p14:sldIdLst>
         </p14:section>
-        <p14:section name="Keyboard and mouse" id="{53d925a1-e373-e2cd-7b0b-3d2b8568e5a0}">
+        <p14:section name="Keyboard and mouse" id="{624b39db-8245-ceb5-2856-361f6760fa6c}">
           <p14:sldIdLst>
             <p14:sldId id="264"/>
             <p14:sldId id="265"/>
@@ -150,13 +150,13 @@
             <p14:sldId id="267"/>
           </p14:sldIdLst>
         </p14:section>
-        <p14:section name="Printers" id="{b10043c3-3fee-6f0d-26b9-9cd1a558e92e}">
+        <p14:section name="Printers" id="{01d9312f-a419-2162-ee03-d2c573fb0e2c}">
           <p14:sldIdLst>
             <p14:sldId id="268"/>
             <p14:sldId id="269"/>
           </p14:sldIdLst>
         </p14:section>
-        <p14:section name="Back to the machine" id="{e18a1a2c-6cdd-b29a-5f68-1d1fcde79f23}">
+        <p14:section name="Back to the machine" id="{c762cb01-0aa7-ba41-4fba-47ca365b09df}">
           <p14:sldIdLst>
             <p14:sldId id="270"/>
             <p14:sldId id="271"/>
@@ -1016,7 +1016,8 @@
             <a:r>
               <a:rPr lang="en-US" dirty="0"/>
               <a:t>The laser printer derives from the photocopier. A drum is charged to about a thousand volts. A laser beam, reflected by a rotating mirror, scans the drum along its length, switched on and off to draw one line of points; the points it strikes lose their charge. The toner is attracted by the points still charged. The drum is pressed against the paper and transfers the toner, which heated rollers fix. Follow the path of the paper in the figure. The page exists first as a bitmap in the printer's memory.
-For the lecturer: Three slides of the original are merged. The page is first built as a bitmap in the printer's memory: a frame buffer for paper.</a:t>
+For the lecturer: Three slides of the original are merged. The page is first built as a bitmap in the printer's memory: a frame buffer for paper.
+Pictures: Laser printer-Writing.svg, DMahalko, traced by Stannered, CC BY 3.0, Wikimedia Commons.</a:t>
             </a:r>
             <a:endParaRPr lang="en-US" dirty="0"/>
           </a:p>
@@ -1730,7 +1731,8 @@
             <a:r>
               <a:rPr lang="en-US" dirty="0"/>
               <a:t>A graphical display is a matrix of points, the pixels, each lit with its own intensity; an image is composed by switching pixels on and off. The first displays showed only characters, in black and white. The density of the pixels gives the resolution, the bits per pixel give the number of colours, from 256 to sixteen million and more. The size is the length of the diagonal, in inches. The display of the kit measures 2.8 inches, with 320 by 240 pixels.
-For the lecturer: The display of the PRG32 kit: 2.8 inches, 320 by 240 pixels, 65,536 colours.</a:t>
+For the lecturer: The display of the PRG32 kit: 2.8 inches, 320 by 240 pixels, 65,536 colours.
+Pictures: Macintosh 128k transparency.png, Grm wnr, CC BY-SA 3.0, Wikimedia Commons.</a:t>
             </a:r>
             <a:endParaRPr lang="en-US" dirty="0"/>
           </a:p>
@@ -1908,7 +1910,8 @@
             <a:r>
               <a:rPr lang="en-US" dirty="0"/>
               <a:t>How a CRT works. A cathode, heated to incandescence, emits electrons. A high voltage between cathode and anode accelerates them into a beam, which other fields focus. Magnetic or electric fields deflect the beam, which strikes a point of the screen: the inner surface is coated with phosphor, and the point lights up. By sweeping the beam line by line, many times per second, the whole picture is painted before the eye notices that the first points have faded.
-For the lecturer: The original schematic had Italian labels: grid, anode, deflection coil, heater, cathode, beam, focusing coil, fluorescent screen.</a:t>
+For the lecturer: The original schematic had Italian labels: grid, anode, deflection coil, heater, cathode, beam, focusing coil, fluorescent screen.
+Pictures: Tennis For Two on a DuMont Lab Oscilloscope Type 304-A.jpg, Brookhaven National Laboratory, Public domain, Wikimedia Commons.</a:t>
             </a:r>
             <a:endParaRPr lang="en-US" dirty="0"/>
           </a:p>
@@ -1997,7 +2000,8 @@
             <a:r>
               <a:rPr lang="en-US" dirty="0"/>
               <a:t>Liquid crystal displays have replaced the tube almost everywhere: better picture, less bulk, weight and power, less strain for the eyes. Liquid crystals are organic molecules that flow like a liquid but keep an ordered structure. An electric field changes their orientation, and with it the way they rotate the polarisation of the light that crosses them. The useful image is the last line of the slide: a crystal is a valve for light, opened and closed by a voltage.
-For the lecturer: LCD: liquid crystal display.</a:t>
+For the lecturer: LCD: liquid crystal display.
+Pictures: TN-LCD-schematic-MS-208kB.png, see the file page, CC BY-SA 3.0, Wikimedia Commons.</a:t>
             </a:r>
             <a:endParaRPr lang="en-US" dirty="0"/>
           </a:p>
@@ -2086,7 +2090,8 @@
             <a:r>
               <a:rPr lang="en-US" dirty="0"/>
               <a:t>Inside a panel there are many cells, each with its contacts, placed between two polarising filters with perpendicular axes, and a light behind. When the crystals of a cell are not driven they rotate the light, which then passes the front filter; when they are driven the light is blocked. In a colour screen each cell is divided in three, with a red, a green and a blue filter: these are the sub-pixels in the photograph, and the three fields of an RGB colour end up there as three voltages.
-For the lecturer: Three sub-pixels per pixel: the R, G and B fields of the RGB565 colour of Lecture 04 end up here, as three voltages.</a:t>
+For the lecturer: Three sub-pixels per pixel: the R, G and B fields of the RGB565 colour of Lecture 04 end up here, as three voltages.
+Pictures: Subpixel rendering LCD photo 3e composite.jpg, ALexL33, CC BY-SA 3.0, Wikimedia Commons.</a:t>
             </a:r>
             <a:endParaRPr lang="en-US" dirty="0"/>
           </a:p>
@@ -3294,7 +3299,63 @@
       </p:sp>
       <p:sp>
         <p:nvSpPr>
-          <p:cNvPr id="12" name="Shape 10"/>
+          <p:cNvPr id="12" name="Text 10"/>
+          <p:cNvSpPr txBox="1"/>
+          <p:nvPr/>
+        </p:nvSpPr>
+        <p:spPr>
+          <a:xfrm>
+            <a:off x="4693615" y="566928"/>
+            <a:ext cx="6949440" cy="640080"/>
+          </a:xfrm>
+          <a:prstGeom prst="rect">
+            <a:avLst/>
+          </a:prstGeom>
+          <a:noFill/>
+          <a:ln/>
+        </p:spPr>
+        <p:txBody>
+          <a:bodyPr wrap="square" lIns="0" tIns="0" rIns="0" bIns="0" rtlCol="0" anchor="t"/>
+          <a:lstStyle/>
+          <a:p>
+            <a:pPr algn="r" indent="0" marL="0">
+              <a:buNone/>
+            </a:pPr>
+            <a:r>
+              <a:rPr lang="en-US" sz="1300" dirty="0">
+                <a:solidFill>
+                  <a:srgbClr val="CFE3EA"/>
+                </a:solidFill>
+                <a:latin typeface="Calibri" pitchFamily="34" charset="0"/>
+                <a:ea typeface="Calibri" pitchFamily="34" charset="-122"/>
+                <a:cs typeface="Calibri" pitchFamily="34" charset="-120"/>
+              </a:rPr>
+              <a:t>Lecture deck. The listings, the complete program and how to test it are in the code deck:</a:t>
+            </a:r>
+            <a:endParaRPr lang="en-US" sz="1300" dirty="0"/>
+          </a:p>
+          <a:p>
+            <a:pPr algn="r" indent="0" marL="0">
+              <a:buNone/>
+            </a:pPr>
+            <a:r>
+              <a:rPr lang="en-US" sz="1300" dirty="0">
+                <a:solidFill>
+                  <a:srgbClr val="CFE3EA"/>
+                </a:solidFill>
+                <a:latin typeface="Calibri" pitchFamily="34" charset="0"/>
+                <a:ea typeface="Calibri" pitchFamily="34" charset="-122"/>
+                <a:cs typeface="Calibri" pitchFamily="34" charset="-120"/>
+              </a:rPr>
+              <a:t>21-Computer_Architecture-Input_Output-Code.pptx</a:t>
+            </a:r>
+            <a:endParaRPr lang="en-US" sz="1300" dirty="0"/>
+          </a:p>
+        </p:txBody>
+      </p:sp>
+      <p:sp>
+        <p:nvSpPr>
+          <p:cNvPr id="13" name="Shape 11"/>
           <p:cNvSpPr/>
           <p:nvPr/>
         </p:nvSpPr>
@@ -3321,7 +3382,7 @@
       </p:sp>
       <p:pic>
         <p:nvPicPr>
-          <p:cNvPr id="13" name="Image 0" descr="/Users/raffaelemontella/devel/riscv-prg32/computer-architecture-with-prg32/tools/assets/lab2_step1_lamps.png">    </p:cNvPr>
+          <p:cNvPr id="14" name="Image 0" descr="/Users/raffaelemontella/devel/riscv-prg32/computer-architecture-with-prg32/tools/assets/lab2_step1_lamps.png">    </p:cNvPr>
           <p:cNvPicPr>
             <a:picLocks noChangeAspect="1"/>
           </p:cNvPicPr>
@@ -7345,8 +7406,8 @@
         </p:blipFill>
         <p:spPr>
           <a:xfrm>
-            <a:off x="7863840" y="2253742"/>
-            <a:ext cx="3779215" cy="2624837"/>
+            <a:off x="7863840" y="1958517"/>
+            <a:ext cx="3779215" cy="3215285"/>
           </a:xfrm>
           <a:prstGeom prst="rect">
             <a:avLst/>
@@ -7386,7 +7447,7 @@
                 <a:ea typeface="Calibri" pitchFamily="34" charset="-122"/>
                 <a:cs typeface="Calibri" pitchFamily="34" charset="-120"/>
               </a:rPr>
-              <a:t>The path of the paper in a laser printer</a:t>
+              <a:t>The laser writes the page on the drum, line by line</a:t>
             </a:r>
             <a:endParaRPr lang="en-US" sz="1200" dirty="0"/>
           </a:p>
@@ -15522,8 +15583,8 @@
         </p:blipFill>
         <p:spPr>
           <a:xfrm>
-            <a:off x="7863840" y="1676552"/>
-            <a:ext cx="3779215" cy="3779215"/>
+            <a:off x="7920917" y="1417320"/>
+            <a:ext cx="3665062" cy="4297680"/>
           </a:xfrm>
           <a:prstGeom prst="rect">
             <a:avLst/>
@@ -17502,8 +17563,8 @@
         </p:blipFill>
         <p:spPr>
           <a:xfrm>
-            <a:off x="7863840" y="1783916"/>
-            <a:ext cx="3779215" cy="3564487"/>
+            <a:off x="7863840" y="1888296"/>
+            <a:ext cx="3779215" cy="3355729"/>
           </a:xfrm>
           <a:prstGeom prst="rect">
             <a:avLst/>
@@ -18014,8 +18075,8 @@
         </p:blipFill>
         <p:spPr>
           <a:xfrm>
-            <a:off x="7863840" y="2190813"/>
-            <a:ext cx="3779215" cy="2750695"/>
+            <a:off x="7863840" y="2501447"/>
+            <a:ext cx="3779215" cy="2129427"/>
           </a:xfrm>
           <a:prstGeom prst="rect">
             <a:avLst/>
@@ -18566,8 +18627,8 @@
         </p:blipFill>
         <p:spPr>
           <a:xfrm>
-            <a:off x="7863840" y="1911062"/>
-            <a:ext cx="3779215" cy="3310196"/>
+            <a:off x="8798749" y="1417320"/>
+            <a:ext cx="1909398" cy="4297680"/>
           </a:xfrm>
           <a:prstGeom prst="rect">
             <a:avLst/>

--- a/en/slides/21-Computer_Architecture-Input_Output.pptx
+++ b/en/slides/21-Computer_Architecture-Input_Output.pptx
@@ -126,13 +126,13 @@
   <p:extLst>
     <p:ext uri="{521415D9-36F7-43E2-AB2F-B90AF26B5E84}">
       <p14:sectionLst xmlns:p14="http://schemas.microsoft.com/office/powerpoint/2010/main">
-        <p14:section name="Opening" id="{68b35ebe-9a3c-2762-35d6-6d393ed1bfe6}">
+        <p14:section name="Opening" id="{e0cc8ee9-c49e-4a73-5ff5-eb2a9a6879ea}">
           <p14:sldIdLst>
             <p14:sldId id="256"/>
             <p14:sldId id="257"/>
           </p14:sldIdLst>
         </p14:section>
-        <p14:section name="Displays" id="{88487962-9b38-c7fe-5104-287bfbdce873}">
+        <p14:section name="Displays" id="{ad1ba76a-b22a-bb07-5d4a-d62d0b427e4b}">
           <p14:sldIdLst>
             <p14:sldId id="258"/>
             <p14:sldId id="259"/>
@@ -142,7 +142,7 @@
             <p14:sldId id="263"/>
           </p14:sldIdLst>
         </p14:section>
-        <p14:section name="Keyboard and mouse" id="{624b39db-8245-ceb5-2856-361f6760fa6c}">
+        <p14:section name="Keyboard and mouse" id="{def70533-1f70-e347-32fa-6dcf654c9bcd}">
           <p14:sldIdLst>
             <p14:sldId id="264"/>
             <p14:sldId id="265"/>
@@ -150,13 +150,13 @@
             <p14:sldId id="267"/>
           </p14:sldIdLst>
         </p14:section>
-        <p14:section name="Printers" id="{01d9312f-a419-2162-ee03-d2c573fb0e2c}">
+        <p14:section name="Printers" id="{77aae214-c933-64bf-088d-305700fe4fc0}">
           <p14:sldIdLst>
             <p14:sldId id="268"/>
             <p14:sldId id="269"/>
           </p14:sldIdLst>
         </p14:section>
-        <p14:section name="Back to the machine" id="{c762cb01-0aa7-ba41-4fba-47ca365b09df}">
+        <p14:section name="Back to the machine" id="{303387fe-64e7-4500-4cf6-14548710cf35}">
           <p14:sldIdLst>
             <p14:sldId id="270"/>
             <p14:sldId id="271"/>
@@ -571,6 +571,8 @@
             <a:r>
               <a:rPr lang="en-US" dirty="0"/>
               <a:t>This lecture is about the border between the machine and the world: the devices through which information enters and leaves. You will see how a picture is formed on a screen, what happens between a key and the processor, what a mouse says, how a laser printer works. The thread that ties them together is that each of these devices, inside, is made of machines you have already designed. And the lecture begins and ends on the kit, with the device you have used since the first laboratory: a button.
+Learning status: UNDERSTAND NOW, by the end of this lecture you explain it, trace it and apply it on your own; USE NOW, you follow and use the recipe today; how it works inside is explained later, or is not part of the course; UNDERSTAND LATER, recognise the name and what it is for; a later lecture explains it. A slide without a badge is context: a story, an example, a question, an exercise.
+Learning status of this lecture. UNDERSTAND NOW: polling, interrupts, DMA; CRT and LCD displays; keyboard and mouse; printers. USE NOW: the complete program, the PRG32 tools (used, not studied, in this course). UNDERSTAND LATER: nothing. A slide without a badge is context: a story, an example, a question, an exercise.
 For the lecturer: Spiral: the students have read the joystick since the first labs; the lecture opens by asking what is behind prg32_input_read, then covers the classic devices and the three ways a processor can deal with them.</a:t>
             </a:r>
             <a:endParaRPr lang="en-US" dirty="0"/>
@@ -660,6 +662,7 @@
             <a:r>
               <a:rPr lang="en-US" dirty="0"/>
               <a:t>The path of a key press, from left to right. The keys are switches arranged in rows and columns: pressing D closes one crossing. An encoder turns the combination of row and column into a code of n bits. A shift register turns those n bits in parallel into n bits in series. A serial interface, for example a USB controller, delivers the code to the system bus and raises an interrupt. The encoder is that of Lecture 11, the shift register that of Lecture 14: you have designed every block of this slide.
+UNDERSTAND NOW: keyboard and mouse.
 For the lecturer: Every block of this slide is a machine the students have already designed: this is the pay-off of Lectures 11 to 14.</a:t>
             </a:r>
             <a:endParaRPr lang="en-US" dirty="0"/>
@@ -749,6 +752,7 @@
             <a:r>
               <a:rPr lang="en-US" dirty="0"/>
               <a:t>The mouse was invented in the 1960s by Douglas Engelbart: a wooden box with two wheels underneath and a wire coming out of the back, like a tail. The two wheels measured the movement along the two axes. In the mechanical mouse a ball turns two rollers, each connected to a counter. In the optical mouse a light and a tiny camera observe the surface below and measure how it moves. In all three, movement becomes two numbers.
+UNDERSTAND NOW: keyboard and mouse.
 For the lecturer: The original deck dates the mouse to 1967, the year the patent was filed; the first prototype is of 1964 and the famous public demonstration of 1968. Counters: the sequential machines of Lecture 13.</a:t>
             </a:r>
             <a:endParaRPr lang="en-US" dirty="0"/>
@@ -838,6 +842,7 @@
             <a:r>
               <a:rPr lang="en-US" dirty="0"/>
               <a:t>What a mouse sends. Each time it moves by a minimum distance, about a hundredth of an inch, it sends three bytes: the movement along x since the last report, the movement along y, and the state of the buttons. Note that it sends movements, not positions: it is the program that keeps the position of the pointer, by adding. Inside, as on the right: two counters, a shift register, a serial interface. The software that talks to the device is its device driver.
+UNDERSTAND NOW: keyboard and mouse.
 For the lecturer: The original deck says the first byte reports the movement 'in the last 100 milliseconds'; modern mice report up to a thousand times per second. The signed movement bytes are two's complement numbers (Lecture 05).</a:t>
             </a:r>
             <a:endParaRPr lang="en-US" dirty="0"/>
@@ -927,6 +932,7 @@
             <a:r>
               <a:rPr lang="en-US" dirty="0"/>
               <a:t>A printer is described by its speed, in lines or pages per minute, and by its resolution, in dots per inch. The technologies, in historical order: daisy wheel and chain printers, which struck whole characters and are disused; dot matrix, in which needles strike an inked ribbon; ink jet, with tiny drops of ink; laser. A printer is also a small computer, with its own processor, memory and firmware.
+UNDERSTAND NOW: printers.
 For the lecturer: Stampante a margherita, a catena, ad aghi, a getto di inchiostro, laser.</a:t>
             </a:r>
             <a:endParaRPr lang="en-US" dirty="0"/>
@@ -1016,6 +1022,7 @@
             <a:r>
               <a:rPr lang="en-US" dirty="0"/>
               <a:t>The laser printer derives from the photocopier. A drum is charged to about a thousand volts. A laser beam, reflected by a rotating mirror, scans the drum along its length, switched on and off to draw one line of points; the points it strikes lose their charge. The toner is attracted by the points still charged. The drum is pressed against the paper and transfers the toner, which heated rollers fix. Follow the path of the paper in the figure. The page exists first as a bitmap in the printer's memory.
+UNDERSTAND NOW: printers.
 For the lecturer: Three slides of the original are merged. The page is first built as a bitmap in the printer's memory: a frame buffer for paper.
 Pictures: Laser printer-Writing.svg, DMahalko, traced by Stannered, CC BY 3.0, Wikimedia Commons.</a:t>
             </a:r>
@@ -1106,6 +1113,7 @@
             <a:r>
               <a:rPr lang="en-US" dirty="0"/>
               <a:t>The devices of the kit in a table: for each, the direction, the connection and the functions with which a cartridge uses it. The joystick and the buttons are inputs, one switch per pin. The display is an output on an SPI bus. The amplifier with its speaker is an output on an I2S bus. The Wi-Fi radio and the USB port work in both directions. Notice that you have never touched any of these connections directly: the runtime does it, and offers you functions.
+UNDERSTAND NOW: polling, interrupts, DMA.
 For the lecturer: Hardware from the PRG32 README and docs/hardware. A switch bounces for a few milliseconds when pressed; sampling it once per frame, every few tens of milliseconds, hides the bounce.</a:t>
             </a:r>
             <a:endParaRPr lang="en-US" dirty="0"/>
@@ -1195,6 +1203,7 @@
             <a:r>
               <a:rPr lang="en-US" dirty="0"/>
               <a:t>Three ways to deal with a device. Polling: the program asks the device, again and again, whether it has something; simple, and wasteful when nothing happens. Interrupts: the device asks for attention when it needs it, as in Lecture 19. Direct memory access: the device exchanges whole blocks of data with the memory by itself, and the processor is only told when it has finished. On the kit all three are at work: you poll the joystick, the timer interrupts, the display and the sound are fed by DMA.
+UNDERSTAND NOW: polling, interrupts, DMA.
 For the lecturer: Programmed I/O, interrupt-driven I/O and DMA. On the kit all three are at work: your game polls the joystick, the timer that paces the frames interrupts, the display and the sound are fed by DMA.</a:t>
             </a:r>
             <a:endParaRPr lang="en-US" dirty="0"/>
@@ -1642,6 +1651,7 @@
             <a:r>
               <a:rPr lang="en-US" dirty="0"/>
               <a:t>Five conclusions. Input/output devices are a fundamental part of computers. Display technology has gone from an electron beam to a transistor behind every pixel. Keyboard, mouse and printer have changed little outside, and inside are made of encoders, counters and shift registers. A device reaches the processor through a controller and a bus, and is handled by polling, interrupts or DMA. And on the kit the whole chain, from a switch to a pixel, can be followed instruction by instruction. Next comes the last part of Verm1.
+Learning status, recap. UNDERSTAND NOW: polling, interrupts, DMA; CRT and LCD displays; keyboard and mouse; printers. USE NOW: the complete program, the PRG32 tools (used, not studied, in this course). UNDERSTAND LATER: nothing. A slide without a badge is context: a story, an example, a question, an exercise.
 For the lecturer: Next: Verm1, part 4: the finished game. Then its publication on the Cartridge Store.</a:t>
             </a:r>
             <a:endParaRPr lang="en-US" dirty="0"/>
@@ -1731,6 +1741,7 @@
             <a:r>
               <a:rPr lang="en-US" dirty="0"/>
               <a:t>A graphical display is a matrix of points, the pixels, each lit with its own intensity; an image is composed by switching pixels on and off. The first displays showed only characters, in black and white. The density of the pixels gives the resolution, the bits per pixel give the number of colours, from 256 to sixteen million and more. The size is the length of the diagonal, in inches. The display of the kit measures 2.8 inches, with 320 by 240 pixels.
+UNDERSTAND NOW: CRT and LCD displays.
 For the lecturer: The display of the PRG32 kit: 2.8 inches, 320 by 240 pixels, 65,536 colours.
 Pictures: Macintosh 128k transparency.png, Grm wnr, CC BY-SA 3.0, Wikimedia Commons.</a:t>
             </a:r>
@@ -1821,6 +1832,7 @@
             <a:r>
               <a:rPr lang="en-US" dirty="0"/>
               <a:t>The cathode-ray tube has a history of more than a century. It was born as a laboratory instrument with Crookes, in the 1870s; Braun made it an oscilloscope in 1897, its first practical use; Rosing in 1907 used it to display shapes from a received signal, the root of television; in 1934 the first television set with a CRT reached the market. From the 1970s to the 1990s it was the display of every terminal and personal computer.
+UNDERSTAND NOW: CRT and LCD displays.
 For the lecturer: The last row summarises the era the original deck illustrated with pictures of an oscilloscope and of the Asteroids arcade cabinet (a vector display driven by a 6502).</a:t>
             </a:r>
             <a:endParaRPr lang="en-US" dirty="0"/>
@@ -1910,6 +1922,7 @@
             <a:r>
               <a:rPr lang="en-US" dirty="0"/>
               <a:t>How a CRT works. A cathode, heated to incandescence, emits electrons. A high voltage between cathode and anode accelerates them into a beam, which other fields focus. Magnetic or electric fields deflect the beam, which strikes a point of the screen: the inner surface is coated with phosphor, and the point lights up. By sweeping the beam line by line, many times per second, the whole picture is painted before the eye notices that the first points have faded.
+UNDERSTAND NOW: CRT and LCD displays.
 For the lecturer: The original schematic had Italian labels: grid, anode, deflection coil, heater, cathode, beam, focusing coil, fluorescent screen.
 Pictures: Tennis For Two on a DuMont Lab Oscilloscope Type 304-A.jpg, Brookhaven National Laboratory, Public domain, Wikimedia Commons.</a:t>
             </a:r>
@@ -2000,6 +2013,7 @@
             <a:r>
               <a:rPr lang="en-US" dirty="0"/>
               <a:t>Liquid crystal displays have replaced the tube almost everywhere: better picture, less bulk, weight and power, less strain for the eyes. Liquid crystals are organic molecules that flow like a liquid but keep an ordered structure. An electric field changes their orientation, and with it the way they rotate the polarisation of the light that crosses them. The useful image is the last line of the slide: a crystal is a valve for light, opened and closed by a voltage.
+UNDERSTAND NOW: CRT and LCD displays.
 For the lecturer: LCD: liquid crystal display.
 Pictures: TN-LCD-schematic-MS-208kB.png, see the file page, CC BY-SA 3.0, Wikimedia Commons.</a:t>
             </a:r>
@@ -2090,6 +2104,7 @@
             <a:r>
               <a:rPr lang="en-US" dirty="0"/>
               <a:t>Inside a panel there are many cells, each with its contacts, placed between two polarising filters with perpendicular axes, and a light behind. When the crystals of a cell are not driven they rotate the light, which then passes the front filter; when they are driven the light is blocked. In a colour screen each cell is divided in three, with a red, a green and a blue filter: these are the sub-pixels in the photograph, and the three fields of an RGB colour end up there as three voltages.
+UNDERSTAND NOW: CRT and LCD displays.
 For the lecturer: Three sub-pixels per pixel: the R, G and B fields of the RGB565 colour of Lecture 04 end up here, as three voltages.
 Pictures: Subpixel rendering LCD photo 3e composite.jpg, ALexL33, CC BY-SA 3.0, Wikimedia Commons.</a:t>
             </a:r>
@@ -2180,6 +2195,7 @@
             <a:r>
               <a:rPr lang="en-US" dirty="0"/>
               <a:t>How are millions of cells driven? A calculator has one contact per segment, which is impossible for a screen. A passive matrix has contacts per row and per column: only one pixel at a time is driven, and the others must remember their state by themselves, which they do badly; hence trails and crosstalk. An active matrix puts a transistor in every cell, in a thin film on the glass: the transistor keeps the state of its pixel while the others are updated. This is TFT, the technology of the display of the kit.
+UNDERSTAND NOW: CRT and LCD displays.
 For the lecturer: TFT: thin-film transistor. The display of the kit is a TFT panel with an ILI9341 controller. New since the original deck: OLED displays, in which each pixel emits its own light and no backlight is needed.</a:t>
             </a:r>
             <a:endParaRPr lang="en-US" dirty="0"/>
@@ -2269,6 +2285,7 @@
             <a:r>
               <a:rPr lang="en-US" dirty="0"/>
               <a:t>The keyboard derives from that of the typewriter and is the main device for entering characters. Its keys are grouped: alphanumeric, special, arrows and functions. Remember one fact, already met in the previous lecture: the keyboard and the video are not connected to each other. When a letter you type appears on the screen, it is because a program read a code from the keyboard and drew a character. Today keyboards are connected by USB or by radio.
+UNDERSTAND NOW: keyboard and mouse.
 For the lecturer: PS/2 was the standard connector before USB. The echo of a key on the screen is a program: read a code, draw a character.</a:t>
             </a:r>
             <a:endParaRPr lang="en-US" dirty="0"/>
@@ -3406,6 +3423,420 @@
       </p:pic>
       <p:sp>
         <p:nvSpPr>
+          <p:cNvPr id="15" name="Shape 12"/>
+          <p:cNvSpPr/>
+          <p:nvPr/>
+        </p:nvSpPr>
+        <p:spPr>
+          <a:xfrm>
+            <a:off x="9690303" y="91440"/>
+            <a:ext cx="1952752" cy="274320"/>
+          </a:xfrm>
+          <a:prstGeom prst="rect">
+            <a:avLst/>
+          </a:prstGeom>
+          <a:solidFill>
+            <a:srgbClr val="F3E8FF"/>
+          </a:solidFill>
+          <a:ln w="12700">
+            <a:solidFill>
+              <a:srgbClr val="7E22CE"/>
+            </a:solidFill>
+            <a:prstDash val="dash"/>
+          </a:ln>
+        </p:spPr>
+      </p:sp>
+      <p:sp>
+        <p:nvSpPr>
+          <p:cNvPr id="16" name="Shape 13"/>
+          <p:cNvSpPr/>
+          <p:nvPr/>
+        </p:nvSpPr>
+        <p:spPr>
+          <a:xfrm>
+            <a:off x="9717735" y="128016"/>
+            <a:ext cx="45720" cy="45720"/>
+          </a:xfrm>
+          <a:prstGeom prst="rect">
+            <a:avLst/>
+          </a:prstGeom>
+          <a:solidFill>
+            <a:srgbClr val="7E22CE"/>
+          </a:solidFill>
+          <a:ln w="12700">
+            <a:solidFill>
+              <a:srgbClr val="7E22CE"/>
+            </a:solidFill>
+            <a:prstDash val="solid"/>
+          </a:ln>
+        </p:spPr>
+      </p:sp>
+      <p:sp>
+        <p:nvSpPr>
+          <p:cNvPr id="17" name="Shape 14"/>
+          <p:cNvSpPr/>
+          <p:nvPr/>
+        </p:nvSpPr>
+        <p:spPr>
+          <a:xfrm>
+            <a:off x="9717735" y="205740"/>
+            <a:ext cx="45720" cy="45720"/>
+          </a:xfrm>
+          <a:prstGeom prst="rect">
+            <a:avLst/>
+          </a:prstGeom>
+          <a:solidFill>
+            <a:srgbClr val="7E22CE"/>
+          </a:solidFill>
+          <a:ln w="12700">
+            <a:solidFill>
+              <a:srgbClr val="7E22CE"/>
+            </a:solidFill>
+            <a:prstDash val="solid"/>
+          </a:ln>
+        </p:spPr>
+      </p:sp>
+      <p:sp>
+        <p:nvSpPr>
+          <p:cNvPr id="18" name="Shape 15"/>
+          <p:cNvSpPr/>
+          <p:nvPr/>
+        </p:nvSpPr>
+        <p:spPr>
+          <a:xfrm>
+            <a:off x="9717735" y="283464"/>
+            <a:ext cx="45720" cy="45720"/>
+          </a:xfrm>
+          <a:prstGeom prst="rect">
+            <a:avLst/>
+          </a:prstGeom>
+          <a:solidFill>
+            <a:srgbClr val="7E22CE"/>
+          </a:solidFill>
+          <a:ln w="12700">
+            <a:solidFill>
+              <a:srgbClr val="7E22CE"/>
+            </a:solidFill>
+            <a:prstDash val="solid"/>
+          </a:ln>
+        </p:spPr>
+      </p:sp>
+      <p:pic>
+        <p:nvPicPr>
+          <p:cNvPr id="19" name="Image 1" descr="preencoded.png">    </p:cNvPr>
+          <p:cNvPicPr>
+            <a:picLocks noChangeAspect="1"/>
+          </p:cNvPicPr>
+          <p:nvPr/>
+        </p:nvPicPr>
+        <p:blipFill>
+          <a:blip r:embed="rId2"/>
+          <a:stretch>
+            <a:fillRect/>
+          </a:stretch>
+        </p:blipFill>
+        <p:spPr>
+          <a:xfrm>
+            <a:off x="9818319" y="128016"/>
+            <a:ext cx="201168" cy="201168"/>
+          </a:xfrm>
+          <a:prstGeom prst="rect">
+            <a:avLst/>
+          </a:prstGeom>
+        </p:spPr>
+      </p:pic>
+      <p:sp>
+        <p:nvSpPr>
+          <p:cNvPr id="20" name="Text 16"/>
+          <p:cNvSpPr txBox="1"/>
+          <p:nvPr/>
+        </p:nvSpPr>
+        <p:spPr>
+          <a:xfrm>
+            <a:off x="10074351" y="91440"/>
+            <a:ext cx="1532128" cy="274320"/>
+          </a:xfrm>
+          <a:prstGeom prst="rect">
+            <a:avLst/>
+          </a:prstGeom>
+          <a:noFill/>
+          <a:ln/>
+        </p:spPr>
+        <p:txBody>
+          <a:bodyPr wrap="square" lIns="0" tIns="0" rIns="0" bIns="0" rtlCol="0" anchor="ctr"/>
+          <a:lstStyle/>
+          <a:p>
+            <a:pPr indent="0" marL="0">
+              <a:buNone/>
+            </a:pPr>
+            <a:r>
+              <a:rPr lang="en-US" sz="1100" b="1" dirty="0">
+                <a:solidFill>
+                  <a:srgbClr val="6B21A8"/>
+                </a:solidFill>
+                <a:latin typeface="Calibri" pitchFamily="34" charset="0"/>
+                <a:ea typeface="Calibri" pitchFamily="34" charset="-122"/>
+                <a:cs typeface="Calibri" pitchFamily="34" charset="-120"/>
+              </a:rPr>
+              <a:t>UNDERSTAND LATER</a:t>
+            </a:r>
+            <a:endParaRPr lang="en-US" sz="1100" dirty="0"/>
+          </a:p>
+        </p:txBody>
+      </p:sp>
+      <p:sp>
+        <p:nvSpPr>
+          <p:cNvPr id="21" name="Shape 17"/>
+          <p:cNvSpPr/>
+          <p:nvPr/>
+        </p:nvSpPr>
+        <p:spPr>
+          <a:xfrm>
+            <a:off x="8407349" y="91440"/>
+            <a:ext cx="1173226" cy="274320"/>
+          </a:xfrm>
+          <a:prstGeom prst="rect">
+            <a:avLst/>
+          </a:prstGeom>
+          <a:solidFill>
+            <a:srgbClr val="FEF3C7"/>
+          </a:solidFill>
+          <a:ln w="12700">
+            <a:solidFill>
+              <a:srgbClr val="B45309"/>
+            </a:solidFill>
+            <a:prstDash val="solid"/>
+          </a:ln>
+        </p:spPr>
+      </p:sp>
+      <p:sp>
+        <p:nvSpPr>
+          <p:cNvPr id="22" name="Shape 18"/>
+          <p:cNvSpPr/>
+          <p:nvPr/>
+        </p:nvSpPr>
+        <p:spPr>
+          <a:xfrm>
+            <a:off x="8407349" y="91440"/>
+            <a:ext cx="27432" cy="274320"/>
+          </a:xfrm>
+          <a:prstGeom prst="rect">
+            <a:avLst/>
+          </a:prstGeom>
+          <a:solidFill>
+            <a:srgbClr val="B45309"/>
+          </a:solidFill>
+          <a:ln w="12700">
+            <a:solidFill>
+              <a:srgbClr val="B45309"/>
+            </a:solidFill>
+            <a:prstDash val="solid"/>
+          </a:ln>
+        </p:spPr>
+      </p:sp>
+      <p:sp>
+        <p:nvSpPr>
+          <p:cNvPr id="23" name="Shape 19"/>
+          <p:cNvSpPr/>
+          <p:nvPr/>
+        </p:nvSpPr>
+        <p:spPr>
+          <a:xfrm>
+            <a:off x="8462213" y="91440"/>
+            <a:ext cx="27432" cy="274320"/>
+          </a:xfrm>
+          <a:prstGeom prst="rect">
+            <a:avLst/>
+          </a:prstGeom>
+          <a:solidFill>
+            <a:srgbClr val="B45309"/>
+          </a:solidFill>
+          <a:ln w="12700">
+            <a:solidFill>
+              <a:srgbClr val="B45309"/>
+            </a:solidFill>
+            <a:prstDash val="solid"/>
+          </a:ln>
+        </p:spPr>
+      </p:sp>
+      <p:pic>
+        <p:nvPicPr>
+          <p:cNvPr id="24" name="Image 2" descr="preencoded.png">    </p:cNvPr>
+          <p:cNvPicPr>
+            <a:picLocks noChangeAspect="1"/>
+          </p:cNvPicPr>
+          <p:nvPr/>
+        </p:nvPicPr>
+        <p:blipFill>
+          <a:blip r:embed="rId3"/>
+          <a:stretch>
+            <a:fillRect/>
+          </a:stretch>
+        </p:blipFill>
+        <p:spPr>
+          <a:xfrm>
+            <a:off x="8535365" y="128016"/>
+            <a:ext cx="201168" cy="201168"/>
+          </a:xfrm>
+          <a:prstGeom prst="rect">
+            <a:avLst/>
+          </a:prstGeom>
+        </p:spPr>
+      </p:pic>
+      <p:sp>
+        <p:nvSpPr>
+          <p:cNvPr id="25" name="Text 20"/>
+          <p:cNvSpPr txBox="1"/>
+          <p:nvPr/>
+        </p:nvSpPr>
+        <p:spPr>
+          <a:xfrm>
+            <a:off x="8791397" y="91440"/>
+            <a:ext cx="752602" cy="274320"/>
+          </a:xfrm>
+          <a:prstGeom prst="rect">
+            <a:avLst/>
+          </a:prstGeom>
+          <a:noFill/>
+          <a:ln/>
+        </p:spPr>
+        <p:txBody>
+          <a:bodyPr wrap="square" lIns="0" tIns="0" rIns="0" bIns="0" rtlCol="0" anchor="ctr"/>
+          <a:lstStyle/>
+          <a:p>
+            <a:pPr indent="0" marL="0">
+              <a:buNone/>
+            </a:pPr>
+            <a:r>
+              <a:rPr lang="en-US" sz="1100" b="1" dirty="0">
+                <a:solidFill>
+                  <a:srgbClr val="92400E"/>
+                </a:solidFill>
+                <a:latin typeface="Calibri" pitchFamily="34" charset="0"/>
+                <a:ea typeface="Calibri" pitchFamily="34" charset="-122"/>
+                <a:cs typeface="Calibri" pitchFamily="34" charset="-120"/>
+              </a:rPr>
+              <a:t>USE NOW</a:t>
+            </a:r>
+            <a:endParaRPr lang="en-US" sz="1100" dirty="0"/>
+          </a:p>
+        </p:txBody>
+      </p:sp>
+      <p:sp>
+        <p:nvSpPr>
+          <p:cNvPr id="26" name="Shape 21"/>
+          <p:cNvSpPr/>
+          <p:nvPr/>
+        </p:nvSpPr>
+        <p:spPr>
+          <a:xfrm>
+            <a:off x="6518097" y="91440"/>
+            <a:ext cx="1779524" cy="274320"/>
+          </a:xfrm>
+          <a:prstGeom prst="rect">
+            <a:avLst/>
+          </a:prstGeom>
+          <a:solidFill>
+            <a:srgbClr val="E0F2FE"/>
+          </a:solidFill>
+          <a:ln w="12700">
+            <a:solidFill>
+              <a:srgbClr val="0369A1"/>
+            </a:solidFill>
+            <a:prstDash val="solid"/>
+          </a:ln>
+        </p:spPr>
+      </p:sp>
+      <p:sp>
+        <p:nvSpPr>
+          <p:cNvPr id="27" name="Shape 22"/>
+          <p:cNvSpPr/>
+          <p:nvPr/>
+        </p:nvSpPr>
+        <p:spPr>
+          <a:xfrm>
+            <a:off x="6518097" y="91440"/>
+            <a:ext cx="73152" cy="274320"/>
+          </a:xfrm>
+          <a:prstGeom prst="rect">
+            <a:avLst/>
+          </a:prstGeom>
+          <a:solidFill>
+            <a:srgbClr val="0369A1"/>
+          </a:solidFill>
+          <a:ln w="12700">
+            <a:solidFill>
+              <a:srgbClr val="0369A1"/>
+            </a:solidFill>
+            <a:prstDash val="solid"/>
+          </a:ln>
+        </p:spPr>
+      </p:sp>
+      <p:pic>
+        <p:nvPicPr>
+          <p:cNvPr id="28" name="Image 3" descr="preencoded.png">    </p:cNvPr>
+          <p:cNvPicPr>
+            <a:picLocks noChangeAspect="1"/>
+          </p:cNvPicPr>
+          <p:nvPr/>
+        </p:nvPicPr>
+        <p:blipFill>
+          <a:blip r:embed="rId4"/>
+          <a:stretch>
+            <a:fillRect/>
+          </a:stretch>
+        </p:blipFill>
+        <p:spPr>
+          <a:xfrm>
+            <a:off x="6646113" y="128016"/>
+            <a:ext cx="201168" cy="201168"/>
+          </a:xfrm>
+          <a:prstGeom prst="rect">
+            <a:avLst/>
+          </a:prstGeom>
+        </p:spPr>
+      </p:pic>
+      <p:sp>
+        <p:nvSpPr>
+          <p:cNvPr id="29" name="Text 23"/>
+          <p:cNvSpPr txBox="1"/>
+          <p:nvPr/>
+        </p:nvSpPr>
+        <p:spPr>
+          <a:xfrm>
+            <a:off x="6902145" y="91440"/>
+            <a:ext cx="1358900" cy="274320"/>
+          </a:xfrm>
+          <a:prstGeom prst="rect">
+            <a:avLst/>
+          </a:prstGeom>
+          <a:noFill/>
+          <a:ln/>
+        </p:spPr>
+        <p:txBody>
+          <a:bodyPr wrap="square" lIns="0" tIns="0" rIns="0" bIns="0" rtlCol="0" anchor="ctr"/>
+          <a:lstStyle/>
+          <a:p>
+            <a:pPr indent="0" marL="0">
+              <a:buNone/>
+            </a:pPr>
+            <a:r>
+              <a:rPr lang="en-US" sz="1100" b="1" dirty="0">
+                <a:solidFill>
+                  <a:srgbClr val="075985"/>
+                </a:solidFill>
+                <a:latin typeface="Calibri" pitchFamily="34" charset="0"/>
+                <a:ea typeface="Calibri" pitchFamily="34" charset="-122"/>
+                <a:cs typeface="Calibri" pitchFamily="34" charset="-120"/>
+              </a:rPr>
+              <a:t>UNDERSTAND NOW</a:t>
+            </a:r>
+            <a:endParaRPr lang="en-US" sz="1100" dirty="0"/>
+          </a:p>
+        </p:txBody>
+      </p:sp>
+      <p:sp>
+        <p:nvSpPr>
           <p:cNvPr id="25" name="Slide Number Placeholder 0"/>
           <p:cNvSpPr>
             <a:spLocks noGrp="1"/>
@@ -5074,6 +5505,133 @@
       </p:sp>
       <p:sp>
         <p:nvSpPr>
+          <p:cNvPr id="39" name="Shape 37"/>
+          <p:cNvSpPr/>
+          <p:nvPr/>
+        </p:nvSpPr>
+        <p:spPr>
+          <a:xfrm>
+            <a:off x="8484692" y="91440"/>
+            <a:ext cx="3158363" cy="274320"/>
+          </a:xfrm>
+          <a:prstGeom prst="rect">
+            <a:avLst/>
+          </a:prstGeom>
+          <a:solidFill>
+            <a:srgbClr val="E0F2FE"/>
+          </a:solidFill>
+          <a:ln w="12700">
+            <a:solidFill>
+              <a:srgbClr val="0369A1"/>
+            </a:solidFill>
+            <a:prstDash val="solid"/>
+          </a:ln>
+        </p:spPr>
+      </p:sp>
+      <p:sp>
+        <p:nvSpPr>
+          <p:cNvPr id="40" name="Shape 38"/>
+          <p:cNvSpPr/>
+          <p:nvPr/>
+        </p:nvSpPr>
+        <p:spPr>
+          <a:xfrm>
+            <a:off x="8484692" y="91440"/>
+            <a:ext cx="73152" cy="274320"/>
+          </a:xfrm>
+          <a:prstGeom prst="rect">
+            <a:avLst/>
+          </a:prstGeom>
+          <a:solidFill>
+            <a:srgbClr val="0369A1"/>
+          </a:solidFill>
+          <a:ln w="12700">
+            <a:solidFill>
+              <a:srgbClr val="0369A1"/>
+            </a:solidFill>
+            <a:prstDash val="solid"/>
+          </a:ln>
+        </p:spPr>
+      </p:sp>
+      <p:pic>
+        <p:nvPicPr>
+          <p:cNvPr id="41" name="Image 0" descr="preencoded.png">    </p:cNvPr>
+          <p:cNvPicPr>
+            <a:picLocks noChangeAspect="1"/>
+          </p:cNvPicPr>
+          <p:nvPr/>
+        </p:nvPicPr>
+        <p:blipFill>
+          <a:blip r:embed="rId1"/>
+          <a:stretch>
+            <a:fillRect/>
+          </a:stretch>
+        </p:blipFill>
+        <p:spPr>
+          <a:xfrm>
+            <a:off x="8612708" y="128016"/>
+            <a:ext cx="201168" cy="201168"/>
+          </a:xfrm>
+          <a:prstGeom prst="rect">
+            <a:avLst/>
+          </a:prstGeom>
+        </p:spPr>
+      </p:pic>
+      <p:sp>
+        <p:nvSpPr>
+          <p:cNvPr id="42" name="Text 39"/>
+          <p:cNvSpPr txBox="1"/>
+          <p:nvPr/>
+        </p:nvSpPr>
+        <p:spPr>
+          <a:xfrm>
+            <a:off x="8868740" y="91440"/>
+            <a:ext cx="2737739" cy="274320"/>
+          </a:xfrm>
+          <a:prstGeom prst="rect">
+            <a:avLst/>
+          </a:prstGeom>
+          <a:noFill/>
+          <a:ln/>
+        </p:spPr>
+        <p:txBody>
+          <a:bodyPr wrap="square" lIns="0" tIns="0" rIns="0" bIns="0" rtlCol="0" anchor="ctr"/>
+          <a:lstStyle/>
+          <a:p>
+            <a:pPr indent="0" marL="0">
+              <a:buNone/>
+            </a:pPr>
+            <a:r>
+              <a:rPr lang="en-US" sz="1100" b="1" dirty="0">
+                <a:solidFill>
+                  <a:srgbClr val="075985"/>
+                </a:solidFill>
+                <a:latin typeface="Calibri" pitchFamily="34" charset="0"/>
+                <a:ea typeface="Calibri" pitchFamily="34" charset="-122"/>
+                <a:cs typeface="Calibri" pitchFamily="34" charset="-120"/>
+              </a:rPr>
+              <a:t>UNDERSTAND NOW</a:t>
+            </a:r>
+            <a:pPr indent="0" marL="0">
+              <a:buNone/>
+            </a:pPr>
+            <a:r>
+              <a:rPr lang="en-US" sz="1100" dirty="0">
+                <a:solidFill>
+                  <a:srgbClr val="075985"/>
+                </a:solidFill>
+                <a:latin typeface="Calibri" pitchFamily="34" charset="0"/>
+                <a:ea typeface="Calibri" pitchFamily="34" charset="-122"/>
+                <a:cs typeface="Calibri" pitchFamily="34" charset="-120"/>
+              </a:rPr>
+              <a:t> · keyboard and mouse</a:t>
+            </a:r>
+            <a:endParaRPr lang="en-US" sz="1100" dirty="0"/>
+          </a:p>
+        </p:txBody>
+      </p:sp>
+      <p:sp>
+        <p:nvSpPr>
           <p:cNvPr id="25" name="Slide Number Placeholder 0"/>
           <p:cNvSpPr>
             <a:spLocks noGrp="1"/>
@@ -5523,6 +6081,133 @@
       </p:sp>
       <p:sp>
         <p:nvSpPr>
+          <p:cNvPr id="13" name="Shape 11"/>
+          <p:cNvSpPr/>
+          <p:nvPr/>
+        </p:nvSpPr>
+        <p:spPr>
+          <a:xfrm>
+            <a:off x="8484692" y="91440"/>
+            <a:ext cx="3158363" cy="274320"/>
+          </a:xfrm>
+          <a:prstGeom prst="rect">
+            <a:avLst/>
+          </a:prstGeom>
+          <a:solidFill>
+            <a:srgbClr val="E0F2FE"/>
+          </a:solidFill>
+          <a:ln w="12700">
+            <a:solidFill>
+              <a:srgbClr val="0369A1"/>
+            </a:solidFill>
+            <a:prstDash val="solid"/>
+          </a:ln>
+        </p:spPr>
+      </p:sp>
+      <p:sp>
+        <p:nvSpPr>
+          <p:cNvPr id="14" name="Shape 12"/>
+          <p:cNvSpPr/>
+          <p:nvPr/>
+        </p:nvSpPr>
+        <p:spPr>
+          <a:xfrm>
+            <a:off x="8484692" y="91440"/>
+            <a:ext cx="73152" cy="274320"/>
+          </a:xfrm>
+          <a:prstGeom prst="rect">
+            <a:avLst/>
+          </a:prstGeom>
+          <a:solidFill>
+            <a:srgbClr val="0369A1"/>
+          </a:solidFill>
+          <a:ln w="12700">
+            <a:solidFill>
+              <a:srgbClr val="0369A1"/>
+            </a:solidFill>
+            <a:prstDash val="solid"/>
+          </a:ln>
+        </p:spPr>
+      </p:sp>
+      <p:pic>
+        <p:nvPicPr>
+          <p:cNvPr id="15" name="Image 0" descr="preencoded.png">    </p:cNvPr>
+          <p:cNvPicPr>
+            <a:picLocks noChangeAspect="1"/>
+          </p:cNvPicPr>
+          <p:nvPr/>
+        </p:nvPicPr>
+        <p:blipFill>
+          <a:blip r:embed="rId1"/>
+          <a:stretch>
+            <a:fillRect/>
+          </a:stretch>
+        </p:blipFill>
+        <p:spPr>
+          <a:xfrm>
+            <a:off x="8612708" y="128016"/>
+            <a:ext cx="201168" cy="201168"/>
+          </a:xfrm>
+          <a:prstGeom prst="rect">
+            <a:avLst/>
+          </a:prstGeom>
+        </p:spPr>
+      </p:pic>
+      <p:sp>
+        <p:nvSpPr>
+          <p:cNvPr id="16" name="Text 13"/>
+          <p:cNvSpPr txBox="1"/>
+          <p:nvPr/>
+        </p:nvSpPr>
+        <p:spPr>
+          <a:xfrm>
+            <a:off x="8868740" y="91440"/>
+            <a:ext cx="2737739" cy="274320"/>
+          </a:xfrm>
+          <a:prstGeom prst="rect">
+            <a:avLst/>
+          </a:prstGeom>
+          <a:noFill/>
+          <a:ln/>
+        </p:spPr>
+        <p:txBody>
+          <a:bodyPr wrap="square" lIns="0" tIns="0" rIns="0" bIns="0" rtlCol="0" anchor="ctr"/>
+          <a:lstStyle/>
+          <a:p>
+            <a:pPr indent="0" marL="0">
+              <a:buNone/>
+            </a:pPr>
+            <a:r>
+              <a:rPr lang="en-US" sz="1100" b="1" dirty="0">
+                <a:solidFill>
+                  <a:srgbClr val="075985"/>
+                </a:solidFill>
+                <a:latin typeface="Calibri" pitchFamily="34" charset="0"/>
+                <a:ea typeface="Calibri" pitchFamily="34" charset="-122"/>
+                <a:cs typeface="Calibri" pitchFamily="34" charset="-120"/>
+              </a:rPr>
+              <a:t>UNDERSTAND NOW</a:t>
+            </a:r>
+            <a:pPr indent="0" marL="0">
+              <a:buNone/>
+            </a:pPr>
+            <a:r>
+              <a:rPr lang="en-US" sz="1100" dirty="0">
+                <a:solidFill>
+                  <a:srgbClr val="075985"/>
+                </a:solidFill>
+                <a:latin typeface="Calibri" pitchFamily="34" charset="0"/>
+                <a:ea typeface="Calibri" pitchFamily="34" charset="-122"/>
+                <a:cs typeface="Calibri" pitchFamily="34" charset="-120"/>
+              </a:rPr>
+              <a:t> · keyboard and mouse</a:t>
+            </a:r>
+            <a:endParaRPr lang="en-US" sz="1100" dirty="0"/>
+          </a:p>
+        </p:txBody>
+      </p:sp>
+      <p:sp>
+        <p:nvSpPr>
           <p:cNvPr id="25" name="Slide Number Placeholder 0"/>
           <p:cNvSpPr>
             <a:spLocks noGrp="1"/>
@@ -6347,6 +7032,133 @@
       </p:sp>
       <p:sp>
         <p:nvSpPr>
+          <p:cNvPr id="21" name="Shape 19"/>
+          <p:cNvSpPr/>
+          <p:nvPr/>
+        </p:nvSpPr>
+        <p:spPr>
+          <a:xfrm>
+            <a:off x="8484692" y="91440"/>
+            <a:ext cx="3158363" cy="274320"/>
+          </a:xfrm>
+          <a:prstGeom prst="rect">
+            <a:avLst/>
+          </a:prstGeom>
+          <a:solidFill>
+            <a:srgbClr val="E0F2FE"/>
+          </a:solidFill>
+          <a:ln w="12700">
+            <a:solidFill>
+              <a:srgbClr val="0369A1"/>
+            </a:solidFill>
+            <a:prstDash val="solid"/>
+          </a:ln>
+        </p:spPr>
+      </p:sp>
+      <p:sp>
+        <p:nvSpPr>
+          <p:cNvPr id="22" name="Shape 20"/>
+          <p:cNvSpPr/>
+          <p:nvPr/>
+        </p:nvSpPr>
+        <p:spPr>
+          <a:xfrm>
+            <a:off x="8484692" y="91440"/>
+            <a:ext cx="73152" cy="274320"/>
+          </a:xfrm>
+          <a:prstGeom prst="rect">
+            <a:avLst/>
+          </a:prstGeom>
+          <a:solidFill>
+            <a:srgbClr val="0369A1"/>
+          </a:solidFill>
+          <a:ln w="12700">
+            <a:solidFill>
+              <a:srgbClr val="0369A1"/>
+            </a:solidFill>
+            <a:prstDash val="solid"/>
+          </a:ln>
+        </p:spPr>
+      </p:sp>
+      <p:pic>
+        <p:nvPicPr>
+          <p:cNvPr id="23" name="Image 0" descr="preencoded.png">    </p:cNvPr>
+          <p:cNvPicPr>
+            <a:picLocks noChangeAspect="1"/>
+          </p:cNvPicPr>
+          <p:nvPr/>
+        </p:nvPicPr>
+        <p:blipFill>
+          <a:blip r:embed="rId1"/>
+          <a:stretch>
+            <a:fillRect/>
+          </a:stretch>
+        </p:blipFill>
+        <p:spPr>
+          <a:xfrm>
+            <a:off x="8612708" y="128016"/>
+            <a:ext cx="201168" cy="201168"/>
+          </a:xfrm>
+          <a:prstGeom prst="rect">
+            <a:avLst/>
+          </a:prstGeom>
+        </p:spPr>
+      </p:pic>
+      <p:sp>
+        <p:nvSpPr>
+          <p:cNvPr id="24" name="Text 21"/>
+          <p:cNvSpPr txBox="1"/>
+          <p:nvPr/>
+        </p:nvSpPr>
+        <p:spPr>
+          <a:xfrm>
+            <a:off x="8868740" y="91440"/>
+            <a:ext cx="2737739" cy="274320"/>
+          </a:xfrm>
+          <a:prstGeom prst="rect">
+            <a:avLst/>
+          </a:prstGeom>
+          <a:noFill/>
+          <a:ln/>
+        </p:spPr>
+        <p:txBody>
+          <a:bodyPr wrap="square" lIns="0" tIns="0" rIns="0" bIns="0" rtlCol="0" anchor="ctr"/>
+          <a:lstStyle/>
+          <a:p>
+            <a:pPr indent="0" marL="0">
+              <a:buNone/>
+            </a:pPr>
+            <a:r>
+              <a:rPr lang="en-US" sz="1100" b="1" dirty="0">
+                <a:solidFill>
+                  <a:srgbClr val="075985"/>
+                </a:solidFill>
+                <a:latin typeface="Calibri" pitchFamily="34" charset="0"/>
+                <a:ea typeface="Calibri" pitchFamily="34" charset="-122"/>
+                <a:cs typeface="Calibri" pitchFamily="34" charset="-120"/>
+              </a:rPr>
+              <a:t>UNDERSTAND NOW</a:t>
+            </a:r>
+            <a:pPr indent="0" marL="0">
+              <a:buNone/>
+            </a:pPr>
+            <a:r>
+              <a:rPr lang="en-US" sz="1100" dirty="0">
+                <a:solidFill>
+                  <a:srgbClr val="075985"/>
+                </a:solidFill>
+                <a:latin typeface="Calibri" pitchFamily="34" charset="0"/>
+                <a:ea typeface="Calibri" pitchFamily="34" charset="-122"/>
+                <a:cs typeface="Calibri" pitchFamily="34" charset="-120"/>
+              </a:rPr>
+              <a:t> · keyboard and mouse</a:t>
+            </a:r>
+            <a:endParaRPr lang="en-US" sz="1100" dirty="0"/>
+          </a:p>
+        </p:txBody>
+      </p:sp>
+      <p:sp>
+        <p:nvSpPr>
           <p:cNvPr id="25" name="Slide Number Placeholder 0"/>
           <p:cNvSpPr>
             <a:spLocks noGrp="1"/>
@@ -6876,6 +7688,133 @@
       </p:sp>
       <p:sp>
         <p:nvSpPr>
+          <p:cNvPr id="13" name="Shape 11"/>
+          <p:cNvSpPr/>
+          <p:nvPr/>
+        </p:nvSpPr>
+        <p:spPr>
+          <a:xfrm>
+            <a:off x="9141282" y="91440"/>
+            <a:ext cx="2501773" cy="274320"/>
+          </a:xfrm>
+          <a:prstGeom prst="rect">
+            <a:avLst/>
+          </a:prstGeom>
+          <a:solidFill>
+            <a:srgbClr val="E0F2FE"/>
+          </a:solidFill>
+          <a:ln w="12700">
+            <a:solidFill>
+              <a:srgbClr val="0369A1"/>
+            </a:solidFill>
+            <a:prstDash val="solid"/>
+          </a:ln>
+        </p:spPr>
+      </p:sp>
+      <p:sp>
+        <p:nvSpPr>
+          <p:cNvPr id="14" name="Shape 12"/>
+          <p:cNvSpPr/>
+          <p:nvPr/>
+        </p:nvSpPr>
+        <p:spPr>
+          <a:xfrm>
+            <a:off x="9141282" y="91440"/>
+            <a:ext cx="73152" cy="274320"/>
+          </a:xfrm>
+          <a:prstGeom prst="rect">
+            <a:avLst/>
+          </a:prstGeom>
+          <a:solidFill>
+            <a:srgbClr val="0369A1"/>
+          </a:solidFill>
+          <a:ln w="12700">
+            <a:solidFill>
+              <a:srgbClr val="0369A1"/>
+            </a:solidFill>
+            <a:prstDash val="solid"/>
+          </a:ln>
+        </p:spPr>
+      </p:sp>
+      <p:pic>
+        <p:nvPicPr>
+          <p:cNvPr id="15" name="Image 0" descr="preencoded.png">    </p:cNvPr>
+          <p:cNvPicPr>
+            <a:picLocks noChangeAspect="1"/>
+          </p:cNvPicPr>
+          <p:nvPr/>
+        </p:nvPicPr>
+        <p:blipFill>
+          <a:blip r:embed="rId1"/>
+          <a:stretch>
+            <a:fillRect/>
+          </a:stretch>
+        </p:blipFill>
+        <p:spPr>
+          <a:xfrm>
+            <a:off x="9269298" y="128016"/>
+            <a:ext cx="201168" cy="201168"/>
+          </a:xfrm>
+          <a:prstGeom prst="rect">
+            <a:avLst/>
+          </a:prstGeom>
+        </p:spPr>
+      </p:pic>
+      <p:sp>
+        <p:nvSpPr>
+          <p:cNvPr id="16" name="Text 13"/>
+          <p:cNvSpPr txBox="1"/>
+          <p:nvPr/>
+        </p:nvSpPr>
+        <p:spPr>
+          <a:xfrm>
+            <a:off x="9525330" y="91440"/>
+            <a:ext cx="2081149" cy="274320"/>
+          </a:xfrm>
+          <a:prstGeom prst="rect">
+            <a:avLst/>
+          </a:prstGeom>
+          <a:noFill/>
+          <a:ln/>
+        </p:spPr>
+        <p:txBody>
+          <a:bodyPr wrap="square" lIns="0" tIns="0" rIns="0" bIns="0" rtlCol="0" anchor="ctr"/>
+          <a:lstStyle/>
+          <a:p>
+            <a:pPr indent="0" marL="0">
+              <a:buNone/>
+            </a:pPr>
+            <a:r>
+              <a:rPr lang="en-US" sz="1100" b="1" dirty="0">
+                <a:solidFill>
+                  <a:srgbClr val="075985"/>
+                </a:solidFill>
+                <a:latin typeface="Calibri" pitchFamily="34" charset="0"/>
+                <a:ea typeface="Calibri" pitchFamily="34" charset="-122"/>
+                <a:cs typeface="Calibri" pitchFamily="34" charset="-120"/>
+              </a:rPr>
+              <a:t>UNDERSTAND NOW</a:t>
+            </a:r>
+            <a:pPr indent="0" marL="0">
+              <a:buNone/>
+            </a:pPr>
+            <a:r>
+              <a:rPr lang="en-US" sz="1100" dirty="0">
+                <a:solidFill>
+                  <a:srgbClr val="075985"/>
+                </a:solidFill>
+                <a:latin typeface="Calibri" pitchFamily="34" charset="0"/>
+                <a:ea typeface="Calibri" pitchFamily="34" charset="-122"/>
+                <a:cs typeface="Calibri" pitchFamily="34" charset="-120"/>
+              </a:rPr>
+              <a:t> · printers</a:t>
+            </a:r>
+            <a:endParaRPr lang="en-US" sz="1100" dirty="0"/>
+          </a:p>
+        </p:txBody>
+      </p:sp>
+      <p:sp>
+        <p:nvSpPr>
           <p:cNvPr id="25" name="Slide Number Placeholder 0"/>
           <p:cNvSpPr>
             <a:spLocks noGrp="1"/>
@@ -7450,6 +8389,133 @@
               <a:t>The laser writes the page on the drum, line by line</a:t>
             </a:r>
             <a:endParaRPr lang="en-US" sz="1200" dirty="0"/>
+          </a:p>
+        </p:txBody>
+      </p:sp>
+      <p:sp>
+        <p:nvSpPr>
+          <p:cNvPr id="17" name="Shape 14"/>
+          <p:cNvSpPr/>
+          <p:nvPr/>
+        </p:nvSpPr>
+        <p:spPr>
+          <a:xfrm>
+            <a:off x="9141282" y="91440"/>
+            <a:ext cx="2501773" cy="274320"/>
+          </a:xfrm>
+          <a:prstGeom prst="rect">
+            <a:avLst/>
+          </a:prstGeom>
+          <a:solidFill>
+            <a:srgbClr val="E0F2FE"/>
+          </a:solidFill>
+          <a:ln w="12700">
+            <a:solidFill>
+              <a:srgbClr val="0369A1"/>
+            </a:solidFill>
+            <a:prstDash val="solid"/>
+          </a:ln>
+        </p:spPr>
+      </p:sp>
+      <p:sp>
+        <p:nvSpPr>
+          <p:cNvPr id="18" name="Shape 15"/>
+          <p:cNvSpPr/>
+          <p:nvPr/>
+        </p:nvSpPr>
+        <p:spPr>
+          <a:xfrm>
+            <a:off x="9141282" y="91440"/>
+            <a:ext cx="73152" cy="274320"/>
+          </a:xfrm>
+          <a:prstGeom prst="rect">
+            <a:avLst/>
+          </a:prstGeom>
+          <a:solidFill>
+            <a:srgbClr val="0369A1"/>
+          </a:solidFill>
+          <a:ln w="12700">
+            <a:solidFill>
+              <a:srgbClr val="0369A1"/>
+            </a:solidFill>
+            <a:prstDash val="solid"/>
+          </a:ln>
+        </p:spPr>
+      </p:sp>
+      <p:pic>
+        <p:nvPicPr>
+          <p:cNvPr id="19" name="Image 1" descr="preencoded.png">    </p:cNvPr>
+          <p:cNvPicPr>
+            <a:picLocks noChangeAspect="1"/>
+          </p:cNvPicPr>
+          <p:nvPr/>
+        </p:nvPicPr>
+        <p:blipFill>
+          <a:blip r:embed="rId2"/>
+          <a:stretch>
+            <a:fillRect/>
+          </a:stretch>
+        </p:blipFill>
+        <p:spPr>
+          <a:xfrm>
+            <a:off x="9269298" y="128016"/>
+            <a:ext cx="201168" cy="201168"/>
+          </a:xfrm>
+          <a:prstGeom prst="rect">
+            <a:avLst/>
+          </a:prstGeom>
+        </p:spPr>
+      </p:pic>
+      <p:sp>
+        <p:nvSpPr>
+          <p:cNvPr id="20" name="Text 16"/>
+          <p:cNvSpPr txBox="1"/>
+          <p:nvPr/>
+        </p:nvSpPr>
+        <p:spPr>
+          <a:xfrm>
+            <a:off x="9525330" y="91440"/>
+            <a:ext cx="2081149" cy="274320"/>
+          </a:xfrm>
+          <a:prstGeom prst="rect">
+            <a:avLst/>
+          </a:prstGeom>
+          <a:noFill/>
+          <a:ln/>
+        </p:spPr>
+        <p:txBody>
+          <a:bodyPr wrap="square" lIns="0" tIns="0" rIns="0" bIns="0" rtlCol="0" anchor="ctr"/>
+          <a:lstStyle/>
+          <a:p>
+            <a:pPr indent="0" marL="0">
+              <a:buNone/>
+            </a:pPr>
+            <a:r>
+              <a:rPr lang="en-US" sz="1100" b="1" dirty="0">
+                <a:solidFill>
+                  <a:srgbClr val="075985"/>
+                </a:solidFill>
+                <a:latin typeface="Calibri" pitchFamily="34" charset="0"/>
+                <a:ea typeface="Calibri" pitchFamily="34" charset="-122"/>
+                <a:cs typeface="Calibri" pitchFamily="34" charset="-120"/>
+              </a:rPr>
+              <a:t>UNDERSTAND NOW</a:t>
+            </a:r>
+            <a:pPr indent="0" marL="0">
+              <a:buNone/>
+            </a:pPr>
+            <a:r>
+              <a:rPr lang="en-US" sz="1100" dirty="0">
+                <a:solidFill>
+                  <a:srgbClr val="075985"/>
+                </a:solidFill>
+                <a:latin typeface="Calibri" pitchFamily="34" charset="0"/>
+                <a:ea typeface="Calibri" pitchFamily="34" charset="-122"/>
+                <a:cs typeface="Calibri" pitchFamily="34" charset="-120"/>
+              </a:rPr>
+              <a:t> · printers</a:t>
+            </a:r>
+            <a:endParaRPr lang="en-US" sz="1100" dirty="0"/>
           </a:p>
         </p:txBody>
       </p:sp>
@@ -9245,6 +10311,133 @@
       </p:graphicFrame>
       <p:sp>
         <p:nvSpPr>
+          <p:cNvPr id="4" name="Shape 1"/>
+          <p:cNvSpPr/>
+          <p:nvPr/>
+        </p:nvSpPr>
+        <p:spPr>
+          <a:xfrm>
+            <a:off x="8090738" y="91440"/>
+            <a:ext cx="3552317" cy="274320"/>
+          </a:xfrm>
+          <a:prstGeom prst="rect">
+            <a:avLst/>
+          </a:prstGeom>
+          <a:solidFill>
+            <a:srgbClr val="E0F2FE"/>
+          </a:solidFill>
+          <a:ln w="12700">
+            <a:solidFill>
+              <a:srgbClr val="0369A1"/>
+            </a:solidFill>
+            <a:prstDash val="solid"/>
+          </a:ln>
+        </p:spPr>
+      </p:sp>
+      <p:sp>
+        <p:nvSpPr>
+          <p:cNvPr id="5" name="Shape 2"/>
+          <p:cNvSpPr/>
+          <p:nvPr/>
+        </p:nvSpPr>
+        <p:spPr>
+          <a:xfrm>
+            <a:off x="8090738" y="91440"/>
+            <a:ext cx="73152" cy="274320"/>
+          </a:xfrm>
+          <a:prstGeom prst="rect">
+            <a:avLst/>
+          </a:prstGeom>
+          <a:solidFill>
+            <a:srgbClr val="0369A1"/>
+          </a:solidFill>
+          <a:ln w="12700">
+            <a:solidFill>
+              <a:srgbClr val="0369A1"/>
+            </a:solidFill>
+            <a:prstDash val="solid"/>
+          </a:ln>
+        </p:spPr>
+      </p:sp>
+      <p:pic>
+        <p:nvPicPr>
+          <p:cNvPr id="6" name="Image 0" descr="preencoded.png">    </p:cNvPr>
+          <p:cNvPicPr>
+            <a:picLocks noChangeAspect="1"/>
+          </p:cNvPicPr>
+          <p:nvPr/>
+        </p:nvPicPr>
+        <p:blipFill>
+          <a:blip r:embed="rId1"/>
+          <a:stretch>
+            <a:fillRect/>
+          </a:stretch>
+        </p:blipFill>
+        <p:spPr>
+          <a:xfrm>
+            <a:off x="8218754" y="128016"/>
+            <a:ext cx="201168" cy="201168"/>
+          </a:xfrm>
+          <a:prstGeom prst="rect">
+            <a:avLst/>
+          </a:prstGeom>
+        </p:spPr>
+      </p:pic>
+      <p:sp>
+        <p:nvSpPr>
+          <p:cNvPr id="7" name="Text 3"/>
+          <p:cNvSpPr txBox="1"/>
+          <p:nvPr/>
+        </p:nvSpPr>
+        <p:spPr>
+          <a:xfrm>
+            <a:off x="8474786" y="91440"/>
+            <a:ext cx="3131693" cy="274320"/>
+          </a:xfrm>
+          <a:prstGeom prst="rect">
+            <a:avLst/>
+          </a:prstGeom>
+          <a:noFill/>
+          <a:ln/>
+        </p:spPr>
+        <p:txBody>
+          <a:bodyPr wrap="square" lIns="0" tIns="0" rIns="0" bIns="0" rtlCol="0" anchor="ctr"/>
+          <a:lstStyle/>
+          <a:p>
+            <a:pPr indent="0" marL="0">
+              <a:buNone/>
+            </a:pPr>
+            <a:r>
+              <a:rPr lang="en-US" sz="1100" b="1" dirty="0">
+                <a:solidFill>
+                  <a:srgbClr val="075985"/>
+                </a:solidFill>
+                <a:latin typeface="Calibri" pitchFamily="34" charset="0"/>
+                <a:ea typeface="Calibri" pitchFamily="34" charset="-122"/>
+                <a:cs typeface="Calibri" pitchFamily="34" charset="-120"/>
+              </a:rPr>
+              <a:t>UNDERSTAND NOW</a:t>
+            </a:r>
+            <a:pPr indent="0" marL="0">
+              <a:buNone/>
+            </a:pPr>
+            <a:r>
+              <a:rPr lang="en-US" sz="1100" dirty="0">
+                <a:solidFill>
+                  <a:srgbClr val="075985"/>
+                </a:solidFill>
+                <a:latin typeface="Calibri" pitchFamily="34" charset="0"/>
+                <a:ea typeface="Calibri" pitchFamily="34" charset="-122"/>
+                <a:cs typeface="Calibri" pitchFamily="34" charset="-120"/>
+              </a:rPr>
+              <a:t> · polling, interrupts, DMA</a:t>
+            </a:r>
+            <a:endParaRPr lang="en-US" sz="1100" dirty="0"/>
+          </a:p>
+        </p:txBody>
+      </p:sp>
+      <p:sp>
+        <p:nvSpPr>
           <p:cNvPr id="25" name="Slide Number Placeholder 0"/>
           <p:cNvSpPr>
             <a:spLocks noGrp="1"/>
@@ -9810,6 +11003,133 @@
               <a:t>The device exchanges whole blocks of data with the memory by itself; the processor only starts the transfer and is told when it ends.</a:t>
             </a:r>
             <a:endParaRPr lang="en-US" sz="2000" dirty="0"/>
+          </a:p>
+        </p:txBody>
+      </p:sp>
+      <p:sp>
+        <p:nvSpPr>
+          <p:cNvPr id="15" name="Shape 13"/>
+          <p:cNvSpPr/>
+          <p:nvPr/>
+        </p:nvSpPr>
+        <p:spPr>
+          <a:xfrm>
+            <a:off x="8090738" y="91440"/>
+            <a:ext cx="3552317" cy="274320"/>
+          </a:xfrm>
+          <a:prstGeom prst="rect">
+            <a:avLst/>
+          </a:prstGeom>
+          <a:solidFill>
+            <a:srgbClr val="E0F2FE"/>
+          </a:solidFill>
+          <a:ln w="12700">
+            <a:solidFill>
+              <a:srgbClr val="0369A1"/>
+            </a:solidFill>
+            <a:prstDash val="solid"/>
+          </a:ln>
+        </p:spPr>
+      </p:sp>
+      <p:sp>
+        <p:nvSpPr>
+          <p:cNvPr id="16" name="Shape 14"/>
+          <p:cNvSpPr/>
+          <p:nvPr/>
+        </p:nvSpPr>
+        <p:spPr>
+          <a:xfrm>
+            <a:off x="8090738" y="91440"/>
+            <a:ext cx="73152" cy="274320"/>
+          </a:xfrm>
+          <a:prstGeom prst="rect">
+            <a:avLst/>
+          </a:prstGeom>
+          <a:solidFill>
+            <a:srgbClr val="0369A1"/>
+          </a:solidFill>
+          <a:ln w="12700">
+            <a:solidFill>
+              <a:srgbClr val="0369A1"/>
+            </a:solidFill>
+            <a:prstDash val="solid"/>
+          </a:ln>
+        </p:spPr>
+      </p:sp>
+      <p:pic>
+        <p:nvPicPr>
+          <p:cNvPr id="17" name="Image 0" descr="preencoded.png">    </p:cNvPr>
+          <p:cNvPicPr>
+            <a:picLocks noChangeAspect="1"/>
+          </p:cNvPicPr>
+          <p:nvPr/>
+        </p:nvPicPr>
+        <p:blipFill>
+          <a:blip r:embed="rId1"/>
+          <a:stretch>
+            <a:fillRect/>
+          </a:stretch>
+        </p:blipFill>
+        <p:spPr>
+          <a:xfrm>
+            <a:off x="8218754" y="128016"/>
+            <a:ext cx="201168" cy="201168"/>
+          </a:xfrm>
+          <a:prstGeom prst="rect">
+            <a:avLst/>
+          </a:prstGeom>
+        </p:spPr>
+      </p:pic>
+      <p:sp>
+        <p:nvSpPr>
+          <p:cNvPr id="18" name="Text 15"/>
+          <p:cNvSpPr txBox="1"/>
+          <p:nvPr/>
+        </p:nvSpPr>
+        <p:spPr>
+          <a:xfrm>
+            <a:off x="8474786" y="91440"/>
+            <a:ext cx="3131693" cy="274320"/>
+          </a:xfrm>
+          <a:prstGeom prst="rect">
+            <a:avLst/>
+          </a:prstGeom>
+          <a:noFill/>
+          <a:ln/>
+        </p:spPr>
+        <p:txBody>
+          <a:bodyPr wrap="square" lIns="0" tIns="0" rIns="0" bIns="0" rtlCol="0" anchor="ctr"/>
+          <a:lstStyle/>
+          <a:p>
+            <a:pPr indent="0" marL="0">
+              <a:buNone/>
+            </a:pPr>
+            <a:r>
+              <a:rPr lang="en-US" sz="1100" b="1" dirty="0">
+                <a:solidFill>
+                  <a:srgbClr val="075985"/>
+                </a:solidFill>
+                <a:latin typeface="Calibri" pitchFamily="34" charset="0"/>
+                <a:ea typeface="Calibri" pitchFamily="34" charset="-122"/>
+                <a:cs typeface="Calibri" pitchFamily="34" charset="-120"/>
+              </a:rPr>
+              <a:t>UNDERSTAND NOW</a:t>
+            </a:r>
+            <a:pPr indent="0" marL="0">
+              <a:buNone/>
+            </a:pPr>
+            <a:r>
+              <a:rPr lang="en-US" sz="1100" dirty="0">
+                <a:solidFill>
+                  <a:srgbClr val="075985"/>
+                </a:solidFill>
+                <a:latin typeface="Calibri" pitchFamily="34" charset="0"/>
+                <a:ea typeface="Calibri" pitchFamily="34" charset="-122"/>
+                <a:cs typeface="Calibri" pitchFamily="34" charset="-120"/>
+              </a:rPr>
+              <a:t> · polling, interrupts, DMA</a:t>
+            </a:r>
+            <a:endParaRPr lang="en-US" sz="1100" dirty="0"/>
           </a:p>
         </p:txBody>
       </p:sp>
@@ -15632,6 +16952,133 @@
       </p:sp>
       <p:sp>
         <p:nvSpPr>
+          <p:cNvPr id="15" name="Shape 12"/>
+          <p:cNvSpPr/>
+          <p:nvPr/>
+        </p:nvSpPr>
+        <p:spPr>
+          <a:xfrm>
+            <a:off x="8353374" y="91440"/>
+            <a:ext cx="3289681" cy="274320"/>
+          </a:xfrm>
+          <a:prstGeom prst="rect">
+            <a:avLst/>
+          </a:prstGeom>
+          <a:solidFill>
+            <a:srgbClr val="E0F2FE"/>
+          </a:solidFill>
+          <a:ln w="12700">
+            <a:solidFill>
+              <a:srgbClr val="0369A1"/>
+            </a:solidFill>
+            <a:prstDash val="solid"/>
+          </a:ln>
+        </p:spPr>
+      </p:sp>
+      <p:sp>
+        <p:nvSpPr>
+          <p:cNvPr id="16" name="Shape 13"/>
+          <p:cNvSpPr/>
+          <p:nvPr/>
+        </p:nvSpPr>
+        <p:spPr>
+          <a:xfrm>
+            <a:off x="8353374" y="91440"/>
+            <a:ext cx="73152" cy="274320"/>
+          </a:xfrm>
+          <a:prstGeom prst="rect">
+            <a:avLst/>
+          </a:prstGeom>
+          <a:solidFill>
+            <a:srgbClr val="0369A1"/>
+          </a:solidFill>
+          <a:ln w="12700">
+            <a:solidFill>
+              <a:srgbClr val="0369A1"/>
+            </a:solidFill>
+            <a:prstDash val="solid"/>
+          </a:ln>
+        </p:spPr>
+      </p:sp>
+      <p:pic>
+        <p:nvPicPr>
+          <p:cNvPr id="17" name="Image 1" descr="preencoded.png">    </p:cNvPr>
+          <p:cNvPicPr>
+            <a:picLocks noChangeAspect="1"/>
+          </p:cNvPicPr>
+          <p:nvPr/>
+        </p:nvPicPr>
+        <p:blipFill>
+          <a:blip r:embed="rId2"/>
+          <a:stretch>
+            <a:fillRect/>
+          </a:stretch>
+        </p:blipFill>
+        <p:spPr>
+          <a:xfrm>
+            <a:off x="8481390" y="128016"/>
+            <a:ext cx="201168" cy="201168"/>
+          </a:xfrm>
+          <a:prstGeom prst="rect">
+            <a:avLst/>
+          </a:prstGeom>
+        </p:spPr>
+      </p:pic>
+      <p:sp>
+        <p:nvSpPr>
+          <p:cNvPr id="18" name="Text 14"/>
+          <p:cNvSpPr txBox="1"/>
+          <p:nvPr/>
+        </p:nvSpPr>
+        <p:spPr>
+          <a:xfrm>
+            <a:off x="8737422" y="91440"/>
+            <a:ext cx="2869057" cy="274320"/>
+          </a:xfrm>
+          <a:prstGeom prst="rect">
+            <a:avLst/>
+          </a:prstGeom>
+          <a:noFill/>
+          <a:ln/>
+        </p:spPr>
+        <p:txBody>
+          <a:bodyPr wrap="square" lIns="0" tIns="0" rIns="0" bIns="0" rtlCol="0" anchor="ctr"/>
+          <a:lstStyle/>
+          <a:p>
+            <a:pPr indent="0" marL="0">
+              <a:buNone/>
+            </a:pPr>
+            <a:r>
+              <a:rPr lang="en-US" sz="1100" b="1" dirty="0">
+                <a:solidFill>
+                  <a:srgbClr val="075985"/>
+                </a:solidFill>
+                <a:latin typeface="Calibri" pitchFamily="34" charset="0"/>
+                <a:ea typeface="Calibri" pitchFamily="34" charset="-122"/>
+                <a:cs typeface="Calibri" pitchFamily="34" charset="-120"/>
+              </a:rPr>
+              <a:t>UNDERSTAND NOW</a:t>
+            </a:r>
+            <a:pPr indent="0" marL="0">
+              <a:buNone/>
+            </a:pPr>
+            <a:r>
+              <a:rPr lang="en-US" sz="1100" dirty="0">
+                <a:solidFill>
+                  <a:srgbClr val="075985"/>
+                </a:solidFill>
+                <a:latin typeface="Calibri" pitchFamily="34" charset="0"/>
+                <a:ea typeface="Calibri" pitchFamily="34" charset="-122"/>
+                <a:cs typeface="Calibri" pitchFamily="34" charset="-120"/>
+              </a:rPr>
+              <a:t> · CRT and LCD displays</a:t>
+            </a:r>
+            <a:endParaRPr lang="en-US" sz="1100" dirty="0"/>
+          </a:p>
+        </p:txBody>
+      </p:sp>
+      <p:sp>
+        <p:nvSpPr>
           <p:cNvPr id="25" name="Slide Number Placeholder 0"/>
           <p:cNvSpPr>
             <a:spLocks noGrp="1"/>
@@ -17013,6 +18460,133 @@
       </p:graphicFrame>
       <p:sp>
         <p:nvSpPr>
+          <p:cNvPr id="4" name="Shape 1"/>
+          <p:cNvSpPr/>
+          <p:nvPr/>
+        </p:nvSpPr>
+        <p:spPr>
+          <a:xfrm>
+            <a:off x="8353374" y="91440"/>
+            <a:ext cx="3289681" cy="274320"/>
+          </a:xfrm>
+          <a:prstGeom prst="rect">
+            <a:avLst/>
+          </a:prstGeom>
+          <a:solidFill>
+            <a:srgbClr val="E0F2FE"/>
+          </a:solidFill>
+          <a:ln w="12700">
+            <a:solidFill>
+              <a:srgbClr val="0369A1"/>
+            </a:solidFill>
+            <a:prstDash val="solid"/>
+          </a:ln>
+        </p:spPr>
+      </p:sp>
+      <p:sp>
+        <p:nvSpPr>
+          <p:cNvPr id="5" name="Shape 2"/>
+          <p:cNvSpPr/>
+          <p:nvPr/>
+        </p:nvSpPr>
+        <p:spPr>
+          <a:xfrm>
+            <a:off x="8353374" y="91440"/>
+            <a:ext cx="73152" cy="274320"/>
+          </a:xfrm>
+          <a:prstGeom prst="rect">
+            <a:avLst/>
+          </a:prstGeom>
+          <a:solidFill>
+            <a:srgbClr val="0369A1"/>
+          </a:solidFill>
+          <a:ln w="12700">
+            <a:solidFill>
+              <a:srgbClr val="0369A1"/>
+            </a:solidFill>
+            <a:prstDash val="solid"/>
+          </a:ln>
+        </p:spPr>
+      </p:sp>
+      <p:pic>
+        <p:nvPicPr>
+          <p:cNvPr id="6" name="Image 0" descr="preencoded.png">    </p:cNvPr>
+          <p:cNvPicPr>
+            <a:picLocks noChangeAspect="1"/>
+          </p:cNvPicPr>
+          <p:nvPr/>
+        </p:nvPicPr>
+        <p:blipFill>
+          <a:blip r:embed="rId1"/>
+          <a:stretch>
+            <a:fillRect/>
+          </a:stretch>
+        </p:blipFill>
+        <p:spPr>
+          <a:xfrm>
+            <a:off x="8481390" y="128016"/>
+            <a:ext cx="201168" cy="201168"/>
+          </a:xfrm>
+          <a:prstGeom prst="rect">
+            <a:avLst/>
+          </a:prstGeom>
+        </p:spPr>
+      </p:pic>
+      <p:sp>
+        <p:nvSpPr>
+          <p:cNvPr id="7" name="Text 3"/>
+          <p:cNvSpPr txBox="1"/>
+          <p:nvPr/>
+        </p:nvSpPr>
+        <p:spPr>
+          <a:xfrm>
+            <a:off x="8737422" y="91440"/>
+            <a:ext cx="2869057" cy="274320"/>
+          </a:xfrm>
+          <a:prstGeom prst="rect">
+            <a:avLst/>
+          </a:prstGeom>
+          <a:noFill/>
+          <a:ln/>
+        </p:spPr>
+        <p:txBody>
+          <a:bodyPr wrap="square" lIns="0" tIns="0" rIns="0" bIns="0" rtlCol="0" anchor="ctr"/>
+          <a:lstStyle/>
+          <a:p>
+            <a:pPr indent="0" marL="0">
+              <a:buNone/>
+            </a:pPr>
+            <a:r>
+              <a:rPr lang="en-US" sz="1100" b="1" dirty="0">
+                <a:solidFill>
+                  <a:srgbClr val="075985"/>
+                </a:solidFill>
+                <a:latin typeface="Calibri" pitchFamily="34" charset="0"/>
+                <a:ea typeface="Calibri" pitchFamily="34" charset="-122"/>
+                <a:cs typeface="Calibri" pitchFamily="34" charset="-120"/>
+              </a:rPr>
+              <a:t>UNDERSTAND NOW</a:t>
+            </a:r>
+            <a:pPr indent="0" marL="0">
+              <a:buNone/>
+            </a:pPr>
+            <a:r>
+              <a:rPr lang="en-US" sz="1100" dirty="0">
+                <a:solidFill>
+                  <a:srgbClr val="075985"/>
+                </a:solidFill>
+                <a:latin typeface="Calibri" pitchFamily="34" charset="0"/>
+                <a:ea typeface="Calibri" pitchFamily="34" charset="-122"/>
+                <a:cs typeface="Calibri" pitchFamily="34" charset="-120"/>
+              </a:rPr>
+              <a:t> · CRT and LCD displays</a:t>
+            </a:r>
+            <a:endParaRPr lang="en-US" sz="1100" dirty="0"/>
+          </a:p>
+        </p:txBody>
+      </p:sp>
+      <p:sp>
+        <p:nvSpPr>
           <p:cNvPr id="25" name="Slide Number Placeholder 0"/>
           <p:cNvSpPr>
             <a:spLocks noGrp="1"/>
@@ -17612,6 +19186,133 @@
       </p:sp>
       <p:sp>
         <p:nvSpPr>
+          <p:cNvPr id="17" name="Shape 14"/>
+          <p:cNvSpPr/>
+          <p:nvPr/>
+        </p:nvSpPr>
+        <p:spPr>
+          <a:xfrm>
+            <a:off x="8353374" y="91440"/>
+            <a:ext cx="3289681" cy="274320"/>
+          </a:xfrm>
+          <a:prstGeom prst="rect">
+            <a:avLst/>
+          </a:prstGeom>
+          <a:solidFill>
+            <a:srgbClr val="E0F2FE"/>
+          </a:solidFill>
+          <a:ln w="12700">
+            <a:solidFill>
+              <a:srgbClr val="0369A1"/>
+            </a:solidFill>
+            <a:prstDash val="solid"/>
+          </a:ln>
+        </p:spPr>
+      </p:sp>
+      <p:sp>
+        <p:nvSpPr>
+          <p:cNvPr id="18" name="Shape 15"/>
+          <p:cNvSpPr/>
+          <p:nvPr/>
+        </p:nvSpPr>
+        <p:spPr>
+          <a:xfrm>
+            <a:off x="8353374" y="91440"/>
+            <a:ext cx="73152" cy="274320"/>
+          </a:xfrm>
+          <a:prstGeom prst="rect">
+            <a:avLst/>
+          </a:prstGeom>
+          <a:solidFill>
+            <a:srgbClr val="0369A1"/>
+          </a:solidFill>
+          <a:ln w="12700">
+            <a:solidFill>
+              <a:srgbClr val="0369A1"/>
+            </a:solidFill>
+            <a:prstDash val="solid"/>
+          </a:ln>
+        </p:spPr>
+      </p:sp>
+      <p:pic>
+        <p:nvPicPr>
+          <p:cNvPr id="19" name="Image 1" descr="preencoded.png">    </p:cNvPr>
+          <p:cNvPicPr>
+            <a:picLocks noChangeAspect="1"/>
+          </p:cNvPicPr>
+          <p:nvPr/>
+        </p:nvPicPr>
+        <p:blipFill>
+          <a:blip r:embed="rId2"/>
+          <a:stretch>
+            <a:fillRect/>
+          </a:stretch>
+        </p:blipFill>
+        <p:spPr>
+          <a:xfrm>
+            <a:off x="8481390" y="128016"/>
+            <a:ext cx="201168" cy="201168"/>
+          </a:xfrm>
+          <a:prstGeom prst="rect">
+            <a:avLst/>
+          </a:prstGeom>
+        </p:spPr>
+      </p:pic>
+      <p:sp>
+        <p:nvSpPr>
+          <p:cNvPr id="20" name="Text 16"/>
+          <p:cNvSpPr txBox="1"/>
+          <p:nvPr/>
+        </p:nvSpPr>
+        <p:spPr>
+          <a:xfrm>
+            <a:off x="8737422" y="91440"/>
+            <a:ext cx="2869057" cy="274320"/>
+          </a:xfrm>
+          <a:prstGeom prst="rect">
+            <a:avLst/>
+          </a:prstGeom>
+          <a:noFill/>
+          <a:ln/>
+        </p:spPr>
+        <p:txBody>
+          <a:bodyPr wrap="square" lIns="0" tIns="0" rIns="0" bIns="0" rtlCol="0" anchor="ctr"/>
+          <a:lstStyle/>
+          <a:p>
+            <a:pPr indent="0" marL="0">
+              <a:buNone/>
+            </a:pPr>
+            <a:r>
+              <a:rPr lang="en-US" sz="1100" b="1" dirty="0">
+                <a:solidFill>
+                  <a:srgbClr val="075985"/>
+                </a:solidFill>
+                <a:latin typeface="Calibri" pitchFamily="34" charset="0"/>
+                <a:ea typeface="Calibri" pitchFamily="34" charset="-122"/>
+                <a:cs typeface="Calibri" pitchFamily="34" charset="-120"/>
+              </a:rPr>
+              <a:t>UNDERSTAND NOW</a:t>
+            </a:r>
+            <a:pPr indent="0" marL="0">
+              <a:buNone/>
+            </a:pPr>
+            <a:r>
+              <a:rPr lang="en-US" sz="1100" dirty="0">
+                <a:solidFill>
+                  <a:srgbClr val="075985"/>
+                </a:solidFill>
+                <a:latin typeface="Calibri" pitchFamily="34" charset="0"/>
+                <a:ea typeface="Calibri" pitchFamily="34" charset="-122"/>
+                <a:cs typeface="Calibri" pitchFamily="34" charset="-120"/>
+              </a:rPr>
+              <a:t> · CRT and LCD displays</a:t>
+            </a:r>
+            <a:endParaRPr lang="en-US" sz="1100" dirty="0"/>
+          </a:p>
+        </p:txBody>
+      </p:sp>
+      <p:sp>
+        <p:nvSpPr>
           <p:cNvPr id="25" name="Slide Number Placeholder 0"/>
           <p:cNvSpPr>
             <a:spLocks noGrp="1"/>
@@ -18124,6 +19825,133 @@
       </p:sp>
       <p:sp>
         <p:nvSpPr>
+          <p:cNvPr id="15" name="Shape 12"/>
+          <p:cNvSpPr/>
+          <p:nvPr/>
+        </p:nvSpPr>
+        <p:spPr>
+          <a:xfrm>
+            <a:off x="8353374" y="91440"/>
+            <a:ext cx="3289681" cy="274320"/>
+          </a:xfrm>
+          <a:prstGeom prst="rect">
+            <a:avLst/>
+          </a:prstGeom>
+          <a:solidFill>
+            <a:srgbClr val="E0F2FE"/>
+          </a:solidFill>
+          <a:ln w="12700">
+            <a:solidFill>
+              <a:srgbClr val="0369A1"/>
+            </a:solidFill>
+            <a:prstDash val="solid"/>
+          </a:ln>
+        </p:spPr>
+      </p:sp>
+      <p:sp>
+        <p:nvSpPr>
+          <p:cNvPr id="16" name="Shape 13"/>
+          <p:cNvSpPr/>
+          <p:nvPr/>
+        </p:nvSpPr>
+        <p:spPr>
+          <a:xfrm>
+            <a:off x="8353374" y="91440"/>
+            <a:ext cx="73152" cy="274320"/>
+          </a:xfrm>
+          <a:prstGeom prst="rect">
+            <a:avLst/>
+          </a:prstGeom>
+          <a:solidFill>
+            <a:srgbClr val="0369A1"/>
+          </a:solidFill>
+          <a:ln w="12700">
+            <a:solidFill>
+              <a:srgbClr val="0369A1"/>
+            </a:solidFill>
+            <a:prstDash val="solid"/>
+          </a:ln>
+        </p:spPr>
+      </p:sp>
+      <p:pic>
+        <p:nvPicPr>
+          <p:cNvPr id="17" name="Image 1" descr="preencoded.png">    </p:cNvPr>
+          <p:cNvPicPr>
+            <a:picLocks noChangeAspect="1"/>
+          </p:cNvPicPr>
+          <p:nvPr/>
+        </p:nvPicPr>
+        <p:blipFill>
+          <a:blip r:embed="rId2"/>
+          <a:stretch>
+            <a:fillRect/>
+          </a:stretch>
+        </p:blipFill>
+        <p:spPr>
+          <a:xfrm>
+            <a:off x="8481390" y="128016"/>
+            <a:ext cx="201168" cy="201168"/>
+          </a:xfrm>
+          <a:prstGeom prst="rect">
+            <a:avLst/>
+          </a:prstGeom>
+        </p:spPr>
+      </p:pic>
+      <p:sp>
+        <p:nvSpPr>
+          <p:cNvPr id="18" name="Text 14"/>
+          <p:cNvSpPr txBox="1"/>
+          <p:nvPr/>
+        </p:nvSpPr>
+        <p:spPr>
+          <a:xfrm>
+            <a:off x="8737422" y="91440"/>
+            <a:ext cx="2869057" cy="274320"/>
+          </a:xfrm>
+          <a:prstGeom prst="rect">
+            <a:avLst/>
+          </a:prstGeom>
+          <a:noFill/>
+          <a:ln/>
+        </p:spPr>
+        <p:txBody>
+          <a:bodyPr wrap="square" lIns="0" tIns="0" rIns="0" bIns="0" rtlCol="0" anchor="ctr"/>
+          <a:lstStyle/>
+          <a:p>
+            <a:pPr indent="0" marL="0">
+              <a:buNone/>
+            </a:pPr>
+            <a:r>
+              <a:rPr lang="en-US" sz="1100" b="1" dirty="0">
+                <a:solidFill>
+                  <a:srgbClr val="075985"/>
+                </a:solidFill>
+                <a:latin typeface="Calibri" pitchFamily="34" charset="0"/>
+                <a:ea typeface="Calibri" pitchFamily="34" charset="-122"/>
+                <a:cs typeface="Calibri" pitchFamily="34" charset="-120"/>
+              </a:rPr>
+              <a:t>UNDERSTAND NOW</a:t>
+            </a:r>
+            <a:pPr indent="0" marL="0">
+              <a:buNone/>
+            </a:pPr>
+            <a:r>
+              <a:rPr lang="en-US" sz="1100" dirty="0">
+                <a:solidFill>
+                  <a:srgbClr val="075985"/>
+                </a:solidFill>
+                <a:latin typeface="Calibri" pitchFamily="34" charset="0"/>
+                <a:ea typeface="Calibri" pitchFamily="34" charset="-122"/>
+                <a:cs typeface="Calibri" pitchFamily="34" charset="-120"/>
+              </a:rPr>
+              <a:t> · CRT and LCD displays</a:t>
+            </a:r>
+            <a:endParaRPr lang="en-US" sz="1100" dirty="0"/>
+          </a:p>
+        </p:txBody>
+      </p:sp>
+      <p:sp>
+        <p:nvSpPr>
           <p:cNvPr id="25" name="Slide Number Placeholder 0"/>
           <p:cNvSpPr>
             <a:spLocks noGrp="1"/>
@@ -18676,6 +20504,133 @@
       </p:sp>
       <p:sp>
         <p:nvSpPr>
+          <p:cNvPr id="15" name="Shape 12"/>
+          <p:cNvSpPr/>
+          <p:nvPr/>
+        </p:nvSpPr>
+        <p:spPr>
+          <a:xfrm>
+            <a:off x="8353374" y="91440"/>
+            <a:ext cx="3289681" cy="274320"/>
+          </a:xfrm>
+          <a:prstGeom prst="rect">
+            <a:avLst/>
+          </a:prstGeom>
+          <a:solidFill>
+            <a:srgbClr val="E0F2FE"/>
+          </a:solidFill>
+          <a:ln w="12700">
+            <a:solidFill>
+              <a:srgbClr val="0369A1"/>
+            </a:solidFill>
+            <a:prstDash val="solid"/>
+          </a:ln>
+        </p:spPr>
+      </p:sp>
+      <p:sp>
+        <p:nvSpPr>
+          <p:cNvPr id="16" name="Shape 13"/>
+          <p:cNvSpPr/>
+          <p:nvPr/>
+        </p:nvSpPr>
+        <p:spPr>
+          <a:xfrm>
+            <a:off x="8353374" y="91440"/>
+            <a:ext cx="73152" cy="274320"/>
+          </a:xfrm>
+          <a:prstGeom prst="rect">
+            <a:avLst/>
+          </a:prstGeom>
+          <a:solidFill>
+            <a:srgbClr val="0369A1"/>
+          </a:solidFill>
+          <a:ln w="12700">
+            <a:solidFill>
+              <a:srgbClr val="0369A1"/>
+            </a:solidFill>
+            <a:prstDash val="solid"/>
+          </a:ln>
+        </p:spPr>
+      </p:sp>
+      <p:pic>
+        <p:nvPicPr>
+          <p:cNvPr id="17" name="Image 1" descr="preencoded.png">    </p:cNvPr>
+          <p:cNvPicPr>
+            <a:picLocks noChangeAspect="1"/>
+          </p:cNvPicPr>
+          <p:nvPr/>
+        </p:nvPicPr>
+        <p:blipFill>
+          <a:blip r:embed="rId2"/>
+          <a:stretch>
+            <a:fillRect/>
+          </a:stretch>
+        </p:blipFill>
+        <p:spPr>
+          <a:xfrm>
+            <a:off x="8481390" y="128016"/>
+            <a:ext cx="201168" cy="201168"/>
+          </a:xfrm>
+          <a:prstGeom prst="rect">
+            <a:avLst/>
+          </a:prstGeom>
+        </p:spPr>
+      </p:pic>
+      <p:sp>
+        <p:nvSpPr>
+          <p:cNvPr id="18" name="Text 14"/>
+          <p:cNvSpPr txBox="1"/>
+          <p:nvPr/>
+        </p:nvSpPr>
+        <p:spPr>
+          <a:xfrm>
+            <a:off x="8737422" y="91440"/>
+            <a:ext cx="2869057" cy="274320"/>
+          </a:xfrm>
+          <a:prstGeom prst="rect">
+            <a:avLst/>
+          </a:prstGeom>
+          <a:noFill/>
+          <a:ln/>
+        </p:spPr>
+        <p:txBody>
+          <a:bodyPr wrap="square" lIns="0" tIns="0" rIns="0" bIns="0" rtlCol="0" anchor="ctr"/>
+          <a:lstStyle/>
+          <a:p>
+            <a:pPr indent="0" marL="0">
+              <a:buNone/>
+            </a:pPr>
+            <a:r>
+              <a:rPr lang="en-US" sz="1100" b="1" dirty="0">
+                <a:solidFill>
+                  <a:srgbClr val="075985"/>
+                </a:solidFill>
+                <a:latin typeface="Calibri" pitchFamily="34" charset="0"/>
+                <a:ea typeface="Calibri" pitchFamily="34" charset="-122"/>
+                <a:cs typeface="Calibri" pitchFamily="34" charset="-120"/>
+              </a:rPr>
+              <a:t>UNDERSTAND NOW</a:t>
+            </a:r>
+            <a:pPr indent="0" marL="0">
+              <a:buNone/>
+            </a:pPr>
+            <a:r>
+              <a:rPr lang="en-US" sz="1100" dirty="0">
+                <a:solidFill>
+                  <a:srgbClr val="075985"/>
+                </a:solidFill>
+                <a:latin typeface="Calibri" pitchFamily="34" charset="0"/>
+                <a:ea typeface="Calibri" pitchFamily="34" charset="-122"/>
+                <a:cs typeface="Calibri" pitchFamily="34" charset="-120"/>
+              </a:rPr>
+              <a:t> · CRT and LCD displays</a:t>
+            </a:r>
+            <a:endParaRPr lang="en-US" sz="1100" dirty="0"/>
+          </a:p>
+        </p:txBody>
+      </p:sp>
+      <p:sp>
+        <p:nvSpPr>
           <p:cNvPr id="25" name="Slide Number Placeholder 0"/>
           <p:cNvSpPr>
             <a:spLocks noGrp="1"/>
@@ -19192,6 +21147,133 @@
       </p:sp>
       <p:sp>
         <p:nvSpPr>
+          <p:cNvPr id="9" name="Shape 7"/>
+          <p:cNvSpPr/>
+          <p:nvPr/>
+        </p:nvSpPr>
+        <p:spPr>
+          <a:xfrm>
+            <a:off x="8353374" y="91440"/>
+            <a:ext cx="3289681" cy="274320"/>
+          </a:xfrm>
+          <a:prstGeom prst="rect">
+            <a:avLst/>
+          </a:prstGeom>
+          <a:solidFill>
+            <a:srgbClr val="E0F2FE"/>
+          </a:solidFill>
+          <a:ln w="12700">
+            <a:solidFill>
+              <a:srgbClr val="0369A1"/>
+            </a:solidFill>
+            <a:prstDash val="solid"/>
+          </a:ln>
+        </p:spPr>
+      </p:sp>
+      <p:sp>
+        <p:nvSpPr>
+          <p:cNvPr id="10" name="Shape 8"/>
+          <p:cNvSpPr/>
+          <p:nvPr/>
+        </p:nvSpPr>
+        <p:spPr>
+          <a:xfrm>
+            <a:off x="8353374" y="91440"/>
+            <a:ext cx="73152" cy="274320"/>
+          </a:xfrm>
+          <a:prstGeom prst="rect">
+            <a:avLst/>
+          </a:prstGeom>
+          <a:solidFill>
+            <a:srgbClr val="0369A1"/>
+          </a:solidFill>
+          <a:ln w="12700">
+            <a:solidFill>
+              <a:srgbClr val="0369A1"/>
+            </a:solidFill>
+            <a:prstDash val="solid"/>
+          </a:ln>
+        </p:spPr>
+      </p:sp>
+      <p:pic>
+        <p:nvPicPr>
+          <p:cNvPr id="11" name="Image 0" descr="preencoded.png">    </p:cNvPr>
+          <p:cNvPicPr>
+            <a:picLocks noChangeAspect="1"/>
+          </p:cNvPicPr>
+          <p:nvPr/>
+        </p:nvPicPr>
+        <p:blipFill>
+          <a:blip r:embed="rId1"/>
+          <a:stretch>
+            <a:fillRect/>
+          </a:stretch>
+        </p:blipFill>
+        <p:spPr>
+          <a:xfrm>
+            <a:off x="8481390" y="128016"/>
+            <a:ext cx="201168" cy="201168"/>
+          </a:xfrm>
+          <a:prstGeom prst="rect">
+            <a:avLst/>
+          </a:prstGeom>
+        </p:spPr>
+      </p:pic>
+      <p:sp>
+        <p:nvSpPr>
+          <p:cNvPr id="12" name="Text 9"/>
+          <p:cNvSpPr txBox="1"/>
+          <p:nvPr/>
+        </p:nvSpPr>
+        <p:spPr>
+          <a:xfrm>
+            <a:off x="8737422" y="91440"/>
+            <a:ext cx="2869057" cy="274320"/>
+          </a:xfrm>
+          <a:prstGeom prst="rect">
+            <a:avLst/>
+          </a:prstGeom>
+          <a:noFill/>
+          <a:ln/>
+        </p:spPr>
+        <p:txBody>
+          <a:bodyPr wrap="square" lIns="0" tIns="0" rIns="0" bIns="0" rtlCol="0" anchor="ctr"/>
+          <a:lstStyle/>
+          <a:p>
+            <a:pPr indent="0" marL="0">
+              <a:buNone/>
+            </a:pPr>
+            <a:r>
+              <a:rPr lang="en-US" sz="1100" b="1" dirty="0">
+                <a:solidFill>
+                  <a:srgbClr val="075985"/>
+                </a:solidFill>
+                <a:latin typeface="Calibri" pitchFamily="34" charset="0"/>
+                <a:ea typeface="Calibri" pitchFamily="34" charset="-122"/>
+                <a:cs typeface="Calibri" pitchFamily="34" charset="-120"/>
+              </a:rPr>
+              <a:t>UNDERSTAND NOW</a:t>
+            </a:r>
+            <a:pPr indent="0" marL="0">
+              <a:buNone/>
+            </a:pPr>
+            <a:r>
+              <a:rPr lang="en-US" sz="1100" dirty="0">
+                <a:solidFill>
+                  <a:srgbClr val="075985"/>
+                </a:solidFill>
+                <a:latin typeface="Calibri" pitchFamily="34" charset="0"/>
+                <a:ea typeface="Calibri" pitchFamily="34" charset="-122"/>
+                <a:cs typeface="Calibri" pitchFamily="34" charset="-120"/>
+              </a:rPr>
+              <a:t> · CRT and LCD displays</a:t>
+            </a:r>
+            <a:endParaRPr lang="en-US" sz="1100" dirty="0"/>
+          </a:p>
+        </p:txBody>
+      </p:sp>
+      <p:sp>
+        <p:nvSpPr>
           <p:cNvPr id="25" name="Slide Number Placeholder 0"/>
           <p:cNvSpPr>
             <a:spLocks noGrp="1"/>
@@ -19696,6 +21778,133 @@
               <a:t>Today's keyboards connect through USB, or wirelessly</a:t>
             </a:r>
             <a:endParaRPr lang="en-US" sz="2200" dirty="0"/>
+          </a:p>
+        </p:txBody>
+      </p:sp>
+      <p:sp>
+        <p:nvSpPr>
+          <p:cNvPr id="13" name="Shape 11"/>
+          <p:cNvSpPr/>
+          <p:nvPr/>
+        </p:nvSpPr>
+        <p:spPr>
+          <a:xfrm>
+            <a:off x="8484692" y="91440"/>
+            <a:ext cx="3158363" cy="274320"/>
+          </a:xfrm>
+          <a:prstGeom prst="rect">
+            <a:avLst/>
+          </a:prstGeom>
+          <a:solidFill>
+            <a:srgbClr val="E0F2FE"/>
+          </a:solidFill>
+          <a:ln w="12700">
+            <a:solidFill>
+              <a:srgbClr val="0369A1"/>
+            </a:solidFill>
+            <a:prstDash val="solid"/>
+          </a:ln>
+        </p:spPr>
+      </p:sp>
+      <p:sp>
+        <p:nvSpPr>
+          <p:cNvPr id="14" name="Shape 12"/>
+          <p:cNvSpPr/>
+          <p:nvPr/>
+        </p:nvSpPr>
+        <p:spPr>
+          <a:xfrm>
+            <a:off x="8484692" y="91440"/>
+            <a:ext cx="73152" cy="274320"/>
+          </a:xfrm>
+          <a:prstGeom prst="rect">
+            <a:avLst/>
+          </a:prstGeom>
+          <a:solidFill>
+            <a:srgbClr val="0369A1"/>
+          </a:solidFill>
+          <a:ln w="12700">
+            <a:solidFill>
+              <a:srgbClr val="0369A1"/>
+            </a:solidFill>
+            <a:prstDash val="solid"/>
+          </a:ln>
+        </p:spPr>
+      </p:sp>
+      <p:pic>
+        <p:nvPicPr>
+          <p:cNvPr id="15" name="Image 0" descr="preencoded.png">    </p:cNvPr>
+          <p:cNvPicPr>
+            <a:picLocks noChangeAspect="1"/>
+          </p:cNvPicPr>
+          <p:nvPr/>
+        </p:nvPicPr>
+        <p:blipFill>
+          <a:blip r:embed="rId1"/>
+          <a:stretch>
+            <a:fillRect/>
+          </a:stretch>
+        </p:blipFill>
+        <p:spPr>
+          <a:xfrm>
+            <a:off x="8612708" y="128016"/>
+            <a:ext cx="201168" cy="201168"/>
+          </a:xfrm>
+          <a:prstGeom prst="rect">
+            <a:avLst/>
+          </a:prstGeom>
+        </p:spPr>
+      </p:pic>
+      <p:sp>
+        <p:nvSpPr>
+          <p:cNvPr id="16" name="Text 13"/>
+          <p:cNvSpPr txBox="1"/>
+          <p:nvPr/>
+        </p:nvSpPr>
+        <p:spPr>
+          <a:xfrm>
+            <a:off x="8868740" y="91440"/>
+            <a:ext cx="2737739" cy="274320"/>
+          </a:xfrm>
+          <a:prstGeom prst="rect">
+            <a:avLst/>
+          </a:prstGeom>
+          <a:noFill/>
+          <a:ln/>
+        </p:spPr>
+        <p:txBody>
+          <a:bodyPr wrap="square" lIns="0" tIns="0" rIns="0" bIns="0" rtlCol="0" anchor="ctr"/>
+          <a:lstStyle/>
+          <a:p>
+            <a:pPr indent="0" marL="0">
+              <a:buNone/>
+            </a:pPr>
+            <a:r>
+              <a:rPr lang="en-US" sz="1100" b="1" dirty="0">
+                <a:solidFill>
+                  <a:srgbClr val="075985"/>
+                </a:solidFill>
+                <a:latin typeface="Calibri" pitchFamily="34" charset="0"/>
+                <a:ea typeface="Calibri" pitchFamily="34" charset="-122"/>
+                <a:cs typeface="Calibri" pitchFamily="34" charset="-120"/>
+              </a:rPr>
+              <a:t>UNDERSTAND NOW</a:t>
+            </a:r>
+            <a:pPr indent="0" marL="0">
+              <a:buNone/>
+            </a:pPr>
+            <a:r>
+              <a:rPr lang="en-US" sz="1100" dirty="0">
+                <a:solidFill>
+                  <a:srgbClr val="075985"/>
+                </a:solidFill>
+                <a:latin typeface="Calibri" pitchFamily="34" charset="0"/>
+                <a:ea typeface="Calibri" pitchFamily="34" charset="-122"/>
+                <a:cs typeface="Calibri" pitchFamily="34" charset="-120"/>
+              </a:rPr>
+              <a:t> · keyboard and mouse</a:t>
+            </a:r>
+            <a:endParaRPr lang="en-US" sz="1100" dirty="0"/>
           </a:p>
         </p:txBody>
       </p:sp>

--- a/en/slides/21-Computer_Architecture-Input_Output.pptx
+++ b/en/slides/21-Computer_Architecture-Input_Output.pptx
@@ -126,13 +126,13 @@
   <p:extLst>
     <p:ext uri="{521415D9-36F7-43E2-AB2F-B90AF26B5E84}">
       <p14:sectionLst xmlns:p14="http://schemas.microsoft.com/office/powerpoint/2010/main">
-        <p14:section name="Opening" id="{e0cc8ee9-c49e-4a73-5ff5-eb2a9a6879ea}">
+        <p14:section name="Opening" id="{592db8d7-fca8-7fcc-19a2-665116b92c38}">
           <p14:sldIdLst>
             <p14:sldId id="256"/>
             <p14:sldId id="257"/>
           </p14:sldIdLst>
         </p14:section>
-        <p14:section name="Displays" id="{ad1ba76a-b22a-bb07-5d4a-d62d0b427e4b}">
+        <p14:section name="Displays" id="{c103e2c5-85e3-df81-70e5-6b17a71e6eeb}">
           <p14:sldIdLst>
             <p14:sldId id="258"/>
             <p14:sldId id="259"/>
@@ -142,7 +142,7 @@
             <p14:sldId id="263"/>
           </p14:sldIdLst>
         </p14:section>
-        <p14:section name="Keyboard and mouse" id="{def70533-1f70-e347-32fa-6dcf654c9bcd}">
+        <p14:section name="Keyboard and mouse" id="{63ce834b-0ae3-79dc-4a3a-860fec26ff23}">
           <p14:sldIdLst>
             <p14:sldId id="264"/>
             <p14:sldId id="265"/>
@@ -150,13 +150,13 @@
             <p14:sldId id="267"/>
           </p14:sldIdLst>
         </p14:section>
-        <p14:section name="Printers" id="{77aae214-c933-64bf-088d-305700fe4fc0}">
+        <p14:section name="Printers" id="{237d2441-41d0-7f5f-7ee9-86e012212d08}">
           <p14:sldIdLst>
             <p14:sldId id="268"/>
             <p14:sldId id="269"/>
           </p14:sldIdLst>
         </p14:section>
-        <p14:section name="Back to the machine" id="{303387fe-64e7-4500-4cf6-14548710cf35}">
+        <p14:section name="Back to the machine" id="{c9bf570e-7ebd-9b93-15fa-b2eb3856758c}">
           <p14:sldIdLst>
             <p14:sldId id="270"/>
             <p14:sldId id="271"/>

--- a/en/slides/21-Computer_Architecture-Input_Output.pptx
+++ b/en/slides/21-Computer_Architecture-Input_Output.pptx
@@ -126,13 +126,13 @@
   <p:extLst>
     <p:ext uri="{521415D9-36F7-43E2-AB2F-B90AF26B5E84}">
       <p14:sectionLst xmlns:p14="http://schemas.microsoft.com/office/powerpoint/2010/main">
-        <p14:section name="Opening" id="{592db8d7-fca8-7fcc-19a2-665116b92c38}">
+        <p14:section name="Opening" id="{00050ba3-276f-326b-d05c-f4f7b1d153b3}">
           <p14:sldIdLst>
             <p14:sldId id="256"/>
             <p14:sldId id="257"/>
           </p14:sldIdLst>
         </p14:section>
-        <p14:section name="Displays" id="{c103e2c5-85e3-df81-70e5-6b17a71e6eeb}">
+        <p14:section name="Displays" id="{cefaf75b-dafc-bc2d-452d-f6fff477208a}">
           <p14:sldIdLst>
             <p14:sldId id="258"/>
             <p14:sldId id="259"/>
@@ -142,7 +142,7 @@
             <p14:sldId id="263"/>
           </p14:sldIdLst>
         </p14:section>
-        <p14:section name="Keyboard and mouse" id="{63ce834b-0ae3-79dc-4a3a-860fec26ff23}">
+        <p14:section name="Keyboard and mouse" id="{29e18fc0-5d8a-406e-2290-23558df3a80b}">
           <p14:sldIdLst>
             <p14:sldId id="264"/>
             <p14:sldId id="265"/>
@@ -150,13 +150,13 @@
             <p14:sldId id="267"/>
           </p14:sldIdLst>
         </p14:section>
-        <p14:section name="Printers" id="{237d2441-41d0-7f5f-7ee9-86e012212d08}">
+        <p14:section name="Printers" id="{aaf8c4b9-b1be-8c97-7524-05101ed33975}">
           <p14:sldIdLst>
             <p14:sldId id="268"/>
             <p14:sldId id="269"/>
           </p14:sldIdLst>
         </p14:section>
-        <p14:section name="Back to the machine" id="{c9bf570e-7ebd-9b93-15fa-b2eb3856758c}">
+        <p14:section name="Back to the machine" id="{1dece5d7-0fd5-d9b6-ba84-0f4f225765ae}">
           <p14:sldIdLst>
             <p14:sldId id="270"/>
             <p14:sldId id="271"/>
@@ -570,7 +570,7 @@
           <a:p>
             <a:r>
               <a:rPr lang="en-US" dirty="0"/>
-              <a:t>This lecture is about the border between the machine and the world: the devices through which information enters and leaves. You will see how a picture is formed on a screen, what happens between a key and the processor, what a mouse says, how a laser printer works. The thread that ties them together is that each of these devices, inside, is made of machines you have already designed. And the lecture begins and ends on the kit, with the device you have used since the first laboratory: a button.
+              <a:t>This lecture concerns the boundary between the machine and the world: the devices through which information enters and leaves. It shows how an image is formed on a screen, what happens between a key and the processor, what a mouse communicates, and how a laser printer works. The unifying thread is that each of these devices is internally composed of machines already designed in this course, encoders, counters, shift registers and controllers. The lecture begins and ends on the kit, with the device used since the first laboratory session: a button.
 Learning status: UNDERSTAND NOW, by the end of this lecture you explain it, trace it and apply it on your own; USE NOW, you follow and use the recipe today; how it works inside is explained later, or is not part of the course; UNDERSTAND LATER, recognise the name and what it is for; a later lecture explains it. A slide without a badge is context: a story, an example, a question, an exercise.
 Learning status of this lecture. UNDERSTAND NOW: polling, interrupts, DMA; CRT and LCD displays; keyboard and mouse; printers. USE NOW: the complete program, the PRG32 tools (used, not studied, in this course). UNDERSTAND LATER: nothing. A slide without a badge is context: a story, an example, a question, an exercise.
 For the lecturer: Spiral: the students have read the joystick since the first labs; the lecture opens by asking what is behind prg32_input_read, then covers the classic devices and the three ways a processor can deal with them.</a:t>
@@ -661,7 +661,7 @@
           <a:p>
             <a:r>
               <a:rPr lang="en-US" dirty="0"/>
-              <a:t>The path of a key press, from left to right. The keys are switches arranged in rows and columns: pressing D closes one crossing. An encoder turns the combination of row and column into a code of n bits. A shift register turns those n bits in parallel into n bits in series. A serial interface, for example a USB controller, delivers the code to the system bus and raises an interrupt. The encoder is that of Lecture 11, the shift register that of Lecture 14: you have designed every block of this slide.
+              <a:t>The path of a key press, from left to right. The keys are switches arranged in rows and columns, so that pressing D closes one crossing. An encoder converts the combination of row and column into an n-bit code. A shift register converts those n parallel bits into n serial bits. A serial interface, for instance a USB controller, delivers the code to the system bus and raises an interrupt. The encoder is that of Lecture 11 and the shift register that of Lecture 14: every block on this slide has already been designed in the course.
 UNDERSTAND NOW: keyboard and mouse.
 For the lecturer: Every block of this slide is a machine the students have already designed: this is the pay-off of Lectures 11 to 14.</a:t>
             </a:r>
@@ -751,7 +751,7 @@
           <a:p>
             <a:r>
               <a:rPr lang="en-US" dirty="0"/>
-              <a:t>The mouse was invented in the 1960s by Douglas Engelbart: a wooden box with two wheels underneath and a wire coming out of the back, like a tail. The two wheels measured the movement along the two axes. In the mechanical mouse a ball turns two rollers, each connected to a counter. In the optical mouse a light and a tiny camera observe the surface below and measure how it moves. In all three, movement becomes two numbers.
+              <a:t>The mouse was invented in the 1960s by Douglas Engelbart: a wooden box with two wheels underneath and a cable emerging from the back, like a tail. The two wheels measured movement along the two axes. In the mechanical mouse a ball turns two rollers, each connected to a counter. In the optical mouse a light source and a tiny camera observe the surface beneath and measure its displacement. In every case movement is converted into two numbers.
 UNDERSTAND NOW: keyboard and mouse.
 For the lecturer: The original deck dates the mouse to 1967, the year the patent was filed; the first prototype is of 1964 and the famous public demonstration of 1968. Counters: the sequential machines of Lecture 13.</a:t>
             </a:r>
@@ -841,7 +841,7 @@
           <a:p>
             <a:r>
               <a:rPr lang="en-US" dirty="0"/>
-              <a:t>What a mouse sends. Each time it moves by a minimum distance, about a hundredth of an inch, it sends three bytes: the movement along x since the last report, the movement along y, and the state of the buttons. Note that it sends movements, not positions: it is the program that keeps the position of the pointer, by adding. Inside, as on the right: two counters, a shift register, a serial interface. The software that talks to the device is its device driver.
+              <a:t>What a mouse transmits. Each time it moves by a minimum distance, about a hundredth of an inch, it sends three bytes: the displacement along x since the last report, the displacement along y, and the state of the buttons. It sends displacements, not positions: the program maintains the position of the pointer by accumulating them. Internally, as shown on the right, there are two counters, a shift register and a serial interface. The software that communicates with the device is its device driver.
 UNDERSTAND NOW: keyboard and mouse.
 For the lecturer: The original deck says the first byte reports the movement 'in the last 100 milliseconds'; modern mice report up to a thousand times per second. The signed movement bytes are two's complement numbers (Lecture 05).</a:t>
             </a:r>
@@ -931,7 +931,7 @@
           <a:p>
             <a:r>
               <a:rPr lang="en-US" dirty="0"/>
-              <a:t>A printer is described by its speed, in lines or pages per minute, and by its resolution, in dots per inch. The technologies, in historical order: daisy wheel and chain printers, which struck whole characters and are disused; dot matrix, in which needles strike an inked ribbon; ink jet, with tiny drops of ink; laser. A printer is also a small computer, with its own processor, memory and firmware.
+              <a:t>A printer is characterised by its speed, in lines or pages per minute, and by its resolution, in dots per inch. The technologies, in historical order: daisy-wheel and chain printers, which struck whole characters and are now obsolete; dot-matrix printers, in which needles strike an inked ribbon; ink-jet printers, which project tiny droplets; and laser printers. A printer is itself a small computer, with its own processor, memory and firmware.
 UNDERSTAND NOW: printers.
 For the lecturer: Stampante a margherita, a catena, ad aghi, a getto di inchiostro, laser.</a:t>
             </a:r>
@@ -1021,7 +1021,7 @@
           <a:p>
             <a:r>
               <a:rPr lang="en-US" dirty="0"/>
-              <a:t>The laser printer derives from the photocopier. A drum is charged to about a thousand volts. A laser beam, reflected by a rotating mirror, scans the drum along its length, switched on and off to draw one line of points; the points it strikes lose their charge. The toner is attracted by the points still charged. The drum is pressed against the paper and transfers the toner, which heated rollers fix. Follow the path of the paper in the figure. The page exists first as a bitmap in the printer's memory.
+              <a:t>The laser printer derives from the photocopier. A drum is charged to about a thousand volts. A laser beam, deflected by a rotating mirror, scans the drum along its length, switched on and off to draw one line of points, and the points it strikes lose their charge. The toner is attracted by the points that remain charged. The drum is pressed against the paper and transfers the toner, which heated rollers then fuse. The page exists first as a bitmap in the printer's memory, so printing is, at bottom, another frame buffer read out line by line.
 UNDERSTAND NOW: printers.
 For the lecturer: Three slides of the original are merged. The page is first built as a bitmap in the printer's memory: a frame buffer for paper.
 Pictures: Laser printer-Writing.svg, DMahalko, traced by Stannered, CC BY 3.0, Wikimedia Commons.</a:t>
@@ -1112,7 +1112,7 @@
           <a:p>
             <a:r>
               <a:rPr lang="en-US" dirty="0"/>
-              <a:t>The devices of the kit in a table: for each, the direction, the connection and the functions with which a cartridge uses it. The joystick and the buttons are inputs, one switch per pin. The display is an output on an SPI bus. The amplifier with its speaker is an output on an I2S bus. The Wi-Fi radio and the USB port work in both directions. Notice that you have never touched any of these connections directly: the runtime does it, and offers you functions.
+              <a:t>The devices of the kit in a table: for each, the direction, the connection and the functions through which a cartridge uses it. The joystick and buttons are inputs, one switch per pin. The display is an output on an SPI bus. The amplifier with its speaker is an output on an I2S bus. The Wi-Fi radio and the USB port operate in both directions. None of these connections has ever been touched directly by a cartridge: the runtime manages them and offers functions, an abstraction whose value this lecture makes clear.
 UNDERSTAND NOW: polling, interrupts, DMA.
 For the lecturer: Hardware from the PRG32 README and docs/hardware. A switch bounces for a few milliseconds when pressed; sampling it once per frame, every few tens of milliseconds, hides the bounce.</a:t>
             </a:r>
@@ -1202,7 +1202,7 @@
           <a:p>
             <a:r>
               <a:rPr lang="en-US" dirty="0"/>
-              <a:t>Three ways to deal with a device. Polling: the program asks the device, again and again, whether it has something; simple, and wasteful when nothing happens. Interrupts: the device asks for attention when it needs it, as in Lecture 19. Direct memory access: the device exchanges whole blocks of data with the memory by itself, and the processor is only told when it has finished. On the kit all three are at work: you poll the joystick, the timer interrupts, the display and the sound are fed by DMA.
+              <a:t>Three ways of dealing with a device. Polling: the program repeatedly asks the device whether it has something; simple, and wasteful when nothing happens. Interrupts: the device requests attention when it needs it, as in Lecture 19. Direct memory access: the device exchanges whole blocks of data with memory by itself, and the processor is notified only on completion. All three are at work on the kit: the joystick is polled, the timer interrupts, and the display and the sound are fed by DMA. The choice among them balances simplicity, responsiveness and processor time.
 UNDERSTAND NOW: polling, interrupts, DMA.
 For the lecturer: Programmed I/O, interrupt-driven I/O and DMA. On the kit all three are at work: your game polls the joystick, the timer that paces the frames interrupts, the display and the sound are fed by DMA.</a:t>
             </a:r>
@@ -1292,8 +1292,8 @@
           <a:p>
             <a:r>
               <a:rPr lang="en-US" dirty="0"/>
-              <a:t>Think of the diagram of the key press: what goes into the encoder, and what comes out?
-Recall the photograph of the pixels under the magnifier: how many coloured elements make up one pixel?
+              <a:t>For the first question one considers the diagram of the key press: what enters the encoder, and what leaves it?
+For the second, one recalls the photograph of the pixels under magnification and counts how many coloured elements form one pixel.
 For the lecturer: 1. Answer: B. From a decoded position in the key matrix to a compact n-bit code, as the encoder of Lecture 11.
 2. Answer: B. Three sub-pixels, each a liquid crystal cell behind a colour filter; a TFT in each stores its state.</a:t>
             </a:r>
@@ -1383,8 +1383,8 @@
           <a:p>
             <a:r>
               <a:rPr lang="en-US" dirty="0"/>
-              <a:t>The answer is in what a passive matrix lacks: something in each cell that keeps its state while the others are being driven.
-Who takes the initiative, the program or the device? In the warm-up it is the program, once per frame.
+              <a:t>For the first question the answer lies in what a passive matrix lacks: an element in each cell that retains its state while the others are driven.
+For the second, the question is who takes the initiative, the program or the device. In the warm-up it is the program, once per frame.
 For the lecturer: 1. Answer: B. Persistence: without a transistor per pixel, the cells respond slowly and keep their state badly while the others are scanned.
 2. Answer: C. The program asks the device periodically. With interrupts the device would call the program.</a:t>
             </a:r>
@@ -1474,7 +1474,7 @@
           <a:p>
             <a:r>
               <a:rPr lang="en-US" dirty="0"/>
-              <a:t>Ten terms. A cathode-ray tube is a tubo a raggi catodici; the backlight is the retroilluminazione. A pointing device is any device, like the mouse, that indicates a position. Dot-matrix and ink-jet printers are ad aghi and a getto d'inchiostro. Polling is interrogazione ciclica, though the English word is the one in use.</a:t>
+              <a:t>Ten terms. A cathode-ray tube is a tubo a raggi catodici; the backlight is the retroilluminazione. A pointing device is any device, such as the mouse, that indicates a position. Dot-matrix and ink-jet printers are ad aghi and a getto d'inchiostro. Polling is interrogazione ciclica, though the English term prevails in practice.</a:t>
             </a:r>
             <a:endParaRPr lang="en-US" dirty="0"/>
           </a:p>
@@ -1562,7 +1562,7 @@
           <a:p>
             <a:r>
               <a:rPr lang="en-US" dirty="0"/>
-              <a:t>Five objectives. Describe how a picture is formed on a cathode-ray tube and on a liquid crystal display, and what an active matrix adds. Explain the path of a key press: matrix, encoder, shift register, serial interface. Say what a mouse sends to the computer and how often. Describe the stages of laser printing. Explain how the kit reads its joystick, and compare three techniques: polling, interrupts and direct memory access.</a:t>
+              <a:t>Five learning outcomes. Describing how an image is formed on a cathode-ray tube and on a liquid-crystal display, and what an active matrix adds. Explaining the path of a key press: matrix, encoder, shift register, serial interface. Stating what a mouse sends to the computer and how often. Describing the stages of laser printing. And explaining how the kit reads its joystick, comparing three techniques: polling, interrupts and direct memory access.</a:t>
             </a:r>
             <a:endParaRPr lang="en-US" dirty="0"/>
           </a:p>
@@ -1650,7 +1650,7 @@
           <a:p>
             <a:r>
               <a:rPr lang="en-US" dirty="0"/>
-              <a:t>Five conclusions. Input/output devices are a fundamental part of computers. Display technology has gone from an electron beam to a transistor behind every pixel. Keyboard, mouse and printer have changed little outside, and inside are made of encoders, counters and shift registers. A device reaches the processor through a controller and a bus, and is handled by polling, interrupts or DMA. And on the kit the whole chain, from a switch to a pixel, can be followed instruction by instruction. Next comes the last part of Verm1.
+              <a:t>Five conclusions. Input/output devices are a fundamental part of computers. Display technology has progressed from an electron beam to a transistor behind every pixel. Keyboard, mouse and printer have changed little externally, and internally consist of encoders, counters and shift registers. A device reaches the processor through a controller and a bus, and is serviced by polling, interrupts or DMA. And on the kit the entire chain, from a switch to a pixel, can be followed instruction by instruction. The last part of Verm1 follows.
 Learning status, recap. UNDERSTAND NOW: polling, interrupts, DMA; CRT and LCD displays; keyboard and mouse; printers. USE NOW: the complete program, the PRG32 tools (used, not studied, in this course). UNDERSTAND LATER: nothing. A slide without a badge is context: a story, an example, a question, an exercise.
 For the lecturer: Next: Verm1, part 4: the finished game. Then its publication on the Cartridge Store.</a:t>
             </a:r>
@@ -1740,7 +1740,7 @@
           <a:p>
             <a:r>
               <a:rPr lang="en-US" dirty="0"/>
-              <a:t>A graphical display is a matrix of points, the pixels, each lit with its own intensity; an image is composed by switching pixels on and off. The first displays showed only characters, in black and white. The density of the pixels gives the resolution, the bits per pixel give the number of colours, from 256 to sixteen million and more. The size is the length of the diagonal, in inches. The display of the kit measures 2.8 inches, with 320 by 240 pixels.
+              <a:t>A graphical display is a matrix of points, the pixels, each lit at its own intensity; an image is composed by turning pixels on and off. The earliest displays showed only characters, in black and white. The density of the pixels determines the resolution, and the bits per pixel the number of colours, from 256 to sixteen million and beyond. The size of a display is the length of its diagonal, in inches. The display of the kit measures 2.8 inches, with 320 by 240 pixels.
 UNDERSTAND NOW: CRT and LCD displays.
 For the lecturer: The display of the PRG32 kit: 2.8 inches, 320 by 240 pixels, 65,536 colours.
 Pictures: Macintosh 128k transparency.png, Grm wnr, CC BY-SA 3.0, Wikimedia Commons.</a:t>
@@ -1831,7 +1831,7 @@
           <a:p>
             <a:r>
               <a:rPr lang="en-US" dirty="0"/>
-              <a:t>The cathode-ray tube has a history of more than a century. It was born as a laboratory instrument with Crookes, in the 1870s; Braun made it an oscilloscope in 1897, its first practical use; Rosing in 1907 used it to display shapes from a received signal, the root of television; in 1934 the first television set with a CRT reached the market. From the 1970s to the 1990s it was the display of every terminal and personal computer.
+              <a:t>The cathode-ray tube has a history of more than a century. It began as a laboratory instrument with Crookes in the 1870s; Braun turned it into an oscilloscope in 1897, its first practical application; Rosing in 1907 used it to display shapes from a received signal, the origin of television; and in 1934 the first television receiver with a CRT reached the market. From the 1970s to the 1990s it was the display of every terminal and personal computer.
 UNDERSTAND NOW: CRT and LCD displays.
 For the lecturer: The last row summarises the era the original deck illustrated with pictures of an oscilloscope and of the Asteroids arcade cabinet (a vector display driven by a 6502).</a:t>
             </a:r>
@@ -1921,7 +1921,7 @@
           <a:p>
             <a:r>
               <a:rPr lang="en-US" dirty="0"/>
-              <a:t>How a CRT works. A cathode, heated to incandescence, emits electrons. A high voltage between cathode and anode accelerates them into a beam, which other fields focus. Magnetic or electric fields deflect the beam, which strikes a point of the screen: the inner surface is coated with phosphor, and the point lights up. By sweeping the beam line by line, many times per second, the whole picture is painted before the eye notices that the first points have faded.
+              <a:t>The operation of a CRT. A cathode, heated to incandescence, emits electrons. A high voltage between cathode and anode accelerates them into a beam, which further fields focus. Magnetic or electric fields deflect the beam, which strikes a point of the screen; the inner surface is coated with phosphor, and the point emits light. By sweeping the beam line by line, many times per second, the whole image is painted before the eye perceives that the first points have faded, a reliance on the persistence of vision.
 UNDERSTAND NOW: CRT and LCD displays.
 For the lecturer: The original schematic had Italian labels: grid, anode, deflection coil, heater, cathode, beam, focusing coil, fluorescent screen.
 Pictures: Tennis For Two on a DuMont Lab Oscilloscope Type 304-A.jpg, Brookhaven National Laboratory, Public domain, Wikimedia Commons.</a:t>
@@ -2012,7 +2012,7 @@
           <a:p>
             <a:r>
               <a:rPr lang="en-US" dirty="0"/>
-              <a:t>Liquid crystal displays have replaced the tube almost everywhere: better picture, less bulk, weight and power, less strain for the eyes. Liquid crystals are organic molecules that flow like a liquid but keep an ordered structure. An electric field changes their orientation, and with it the way they rotate the polarisation of the light that crosses them. The useful image is the last line of the slide: a crystal is a valve for light, opened and closed by a voltage.
+              <a:t>Liquid-crystal displays have replaced the tube almost everywhere, offering a better image, less bulk, weight and power consumption, and less eye strain. Liquid crystals are organic molecules that flow like a liquid yet retain an ordered structure. An electric field alters their orientation, and with it the way they rotate the polarisation of the light passing through them. The image on the last line is apt: a crystal is a valve for light, opened and closed by a voltage.
 UNDERSTAND NOW: CRT and LCD displays.
 For the lecturer: LCD: liquid crystal display.
 Pictures: TN-LCD-schematic-MS-208kB.png, see the file page, CC BY-SA 3.0, Wikimedia Commons.</a:t>
@@ -2103,7 +2103,7 @@
           <a:p>
             <a:r>
               <a:rPr lang="en-US" dirty="0"/>
-              <a:t>Inside a panel there are many cells, each with its contacts, placed between two polarising filters with perpendicular axes, and a light behind. When the crystals of a cell are not driven they rotate the light, which then passes the front filter; when they are driven the light is blocked. In a colour screen each cell is divided in three, with a red, a green and a blue filter: these are the sub-pixels in the photograph, and the three fields of an RGB colour end up there as three voltages.
+              <a:t>A panel contains many cells, each with its contacts, placed between two polarising filters with perpendicular axes, with a light source behind. When the crystals of a cell are not driven they rotate the light, which then passes the front filter; when they are driven the light is blocked. In a colour screen each cell is subdivided into three, with red, green and blue filters: these are the sub-pixels visible in the photograph, and the three fields of an RGB colour, from Lecture 04, end up there as three voltages.
 UNDERSTAND NOW: CRT and LCD displays.
 For the lecturer: Three sub-pixels per pixel: the R, G and B fields of the RGB565 colour of Lecture 04 end up here, as three voltages.
 Pictures: Subpixel rendering LCD photo 3e composite.jpg, ALexL33, CC BY-SA 3.0, Wikimedia Commons.</a:t>
@@ -2194,7 +2194,7 @@
           <a:p>
             <a:r>
               <a:rPr lang="en-US" dirty="0"/>
-              <a:t>How are millions of cells driven? A calculator has one contact per segment, which is impossible for a screen. A passive matrix has contacts per row and per column: only one pixel at a time is driven, and the others must remember their state by themselves, which they do badly; hence trails and crosstalk. An active matrix puts a transistor in every cell, in a thin film on the glass: the transistor keeps the state of its pixel while the others are updated. This is TFT, the technology of the display of the kit.
+              <a:t>How are millions of cells driven? A calculator has one contact per segment, an approach impossible at the scale of a screen. A passive matrix has contacts per row and per column: only one pixel at a time is driven, and the others must retain their state unaided, which they do poorly, producing trails and crosstalk. An active matrix places a transistor in every cell, in a thin film on the glass, and the transistor holds the state of its pixel while the others are updated. This is TFT, the technology of the display of the kit; the transistor acts as a one-pixel memory, an idea recognisable from Lecture 13.
 UNDERSTAND NOW: CRT and LCD displays.
 For the lecturer: TFT: thin-film transistor. The display of the kit is a TFT panel with an ILI9341 controller. New since the original deck: OLED displays, in which each pixel emits its own light and no backlight is needed.</a:t>
             </a:r>
@@ -2284,7 +2284,7 @@
           <a:p>
             <a:r>
               <a:rPr lang="en-US" dirty="0"/>
-              <a:t>The keyboard derives from that of the typewriter and is the main device for entering characters. Its keys are grouped: alphanumeric, special, arrows and functions. Remember one fact, already met in the previous lecture: the keyboard and the video are not connected to each other. When a letter you type appears on the screen, it is because a program read a code from the keyboard and drew a character. Today keyboards are connected by USB or by radio.
+              <a:t>The keyboard derives from that of the typewriter and is the principal device for entering characters. Its keys are grouped into alphanumeric keys, special keys, arrows and function keys. One fact, already met in the previous lecture, deserves repetition: keyboard and display are not connected to each other. When a typed letter appears on the screen, it is because a program has read a code from the keyboard and drawn a character. Today keyboards are connected by USB or by radio.
 UNDERSTAND NOW: keyboard and mouse.
 For the lecturer: PS/2 was the standard connector before USB. The echo of a key on the screen is a program: read a code, draw a character.</a:t>
             </a:r>
@@ -3364,7 +3364,7 @@
                 <a:ea typeface="Calibri" pitchFamily="34" charset="-122"/>
                 <a:cs typeface="Calibri" pitchFamily="34" charset="-120"/>
               </a:rPr>
-              <a:t>21-Computer_Architecture-Input_Output-Code.pptx</a:t>
+              <a:t>21-Computer_Architecture-Input_Output-Lab.pptx</a:t>
             </a:r>
             <a:endParaRPr lang="en-US" sz="1300" dirty="0"/>
           </a:p>

--- a/en/slides/21-Computer_Architecture-Input_Output.pptx
+++ b/en/slides/21-Computer_Architecture-Input_Output.pptx
@@ -126,13 +126,13 @@
   <p:extLst>
     <p:ext uri="{521415D9-36F7-43E2-AB2F-B90AF26B5E84}">
       <p14:sectionLst xmlns:p14="http://schemas.microsoft.com/office/powerpoint/2010/main">
-        <p14:section name="Opening" id="{00050ba3-276f-326b-d05c-f4f7b1d153b3}">
+        <p14:section name="Opening" id="{fc30ea9a-5c27-8941-71b2-dd9a14af3181}">
           <p14:sldIdLst>
             <p14:sldId id="256"/>
             <p14:sldId id="257"/>
           </p14:sldIdLst>
         </p14:section>
-        <p14:section name="Displays" id="{cefaf75b-dafc-bc2d-452d-f6fff477208a}">
+        <p14:section name="Displays" id="{312a755d-af97-5213-c630-5f38b32402db}">
           <p14:sldIdLst>
             <p14:sldId id="258"/>
             <p14:sldId id="259"/>
@@ -142,7 +142,7 @@
             <p14:sldId id="263"/>
           </p14:sldIdLst>
         </p14:section>
-        <p14:section name="Keyboard and mouse" id="{29e18fc0-5d8a-406e-2290-23558df3a80b}">
+        <p14:section name="Keyboard and mouse" id="{e931182a-ce90-ede6-24bc-d50980a0c7d2}">
           <p14:sldIdLst>
             <p14:sldId id="264"/>
             <p14:sldId id="265"/>
@@ -150,13 +150,13 @@
             <p14:sldId id="267"/>
           </p14:sldIdLst>
         </p14:section>
-        <p14:section name="Printers" id="{aaf8c4b9-b1be-8c97-7524-05101ed33975}">
+        <p14:section name="Printers" id="{111e3845-89f0-68da-5b14-1bec70169541}">
           <p14:sldIdLst>
             <p14:sldId id="268"/>
             <p14:sldId id="269"/>
           </p14:sldIdLst>
         </p14:section>
-        <p14:section name="Back to the machine" id="{1dece5d7-0fd5-d9b6-ba84-0f4f225765ae}">
+        <p14:section name="Back to the machine" id="{6278e474-0670-108e-2088-de2ccfb0b5c3}">
           <p14:sldIdLst>
             <p14:sldId id="270"/>
             <p14:sldId id="271"/>

--- a/en/slides/21-Computer_Architecture-Input_Output.pptx
+++ b/en/slides/21-Computer_Architecture-Input_Output.pptx
@@ -126,13 +126,13 @@
   <p:extLst>
     <p:ext uri="{521415D9-36F7-43E2-AB2F-B90AF26B5E84}">
       <p14:sectionLst xmlns:p14="http://schemas.microsoft.com/office/powerpoint/2010/main">
-        <p14:section name="Opening" id="{fc30ea9a-5c27-8941-71b2-dd9a14af3181}">
+        <p14:section name="Opening" id="{6c9cea5f-6e3f-f2e8-07b3-763ae95842d9}">
           <p14:sldIdLst>
             <p14:sldId id="256"/>
             <p14:sldId id="257"/>
           </p14:sldIdLst>
         </p14:section>
-        <p14:section name="Displays" id="{312a755d-af97-5213-c630-5f38b32402db}">
+        <p14:section name="Displays" id="{84beca7a-0742-8b61-e28f-015863237e51}">
           <p14:sldIdLst>
             <p14:sldId id="258"/>
             <p14:sldId id="259"/>
@@ -142,7 +142,7 @@
             <p14:sldId id="263"/>
           </p14:sldIdLst>
         </p14:section>
-        <p14:section name="Keyboard and mouse" id="{e931182a-ce90-ede6-24bc-d50980a0c7d2}">
+        <p14:section name="Keyboard and mouse" id="{2bbbfd63-2061-2a60-8381-afa5bd91b091}">
           <p14:sldIdLst>
             <p14:sldId id="264"/>
             <p14:sldId id="265"/>
@@ -150,13 +150,13 @@
             <p14:sldId id="267"/>
           </p14:sldIdLst>
         </p14:section>
-        <p14:section name="Printers" id="{111e3845-89f0-68da-5b14-1bec70169541}">
+        <p14:section name="Printers" id="{5f7618a9-58fc-ccbf-0f81-8b112bcee28e}">
           <p14:sldIdLst>
             <p14:sldId id="268"/>
             <p14:sldId id="269"/>
           </p14:sldIdLst>
         </p14:section>
-        <p14:section name="Back to the machine" id="{6278e474-0670-108e-2088-de2ccfb0b5c3}">
+        <p14:section name="Back to the machine" id="{ef35eebe-66b1-ffb4-de8b-42171dd464d8}">
           <p14:sldIdLst>
             <p14:sldId id="270"/>
             <p14:sldId id="271"/>
@@ -573,6 +573,7 @@
               <a:t>This lecture concerns the boundary between the machine and the world: the devices through which information enters and leaves. It shows how an image is formed on a screen, what happens between a key and the processor, what a mouse communicates, and how a laser printer works. The unifying thread is that each of these devices is internally composed of machines already designed in this course, encoders, counters, shift registers and controllers. The lecture begins and ends on the kit, with the device used since the first laboratory session: a button.
 Learning status: UNDERSTAND NOW, by the end of this lecture you explain it, trace it and apply it on your own; USE NOW, you follow and use the recipe today; how it works inside is explained later, or is not part of the course; UNDERSTAND LATER, recognise the name and what it is for; a later lecture explains it. A slide without a badge is context: a story, an example, a question, an exercise.
 Learning status of this lecture. UNDERSTAND NOW: polling, interrupts, DMA; CRT and LCD displays; keyboard and mouse; printers. USE NOW: the complete program, the PRG32 tools (used, not studied, in this course). UNDERSTAND LATER: nothing. A slide without a badge is context: a story, an example, a question, an exercise.
+Roadmap. Today's outcomes: (1) describe how displays, keyboards and printers work; (2) compare polling with interrupts for reading a device. Builds on: only what Lecture 01 set up. Next: Lecture 22, Verm1, Part 4: The Finished Game.
 For the lecturer: Spiral: the students have read the joystick since the first labs; the lecture opens by asking what is behind prg32_input_read, then covers the classic devices and the three ways a processor can deal with them.</a:t>
             </a:r>
             <a:endParaRPr lang="en-US" dirty="0"/>
@@ -1651,7 +1652,7 @@
             <a:r>
               <a:rPr lang="en-US" dirty="0"/>
               <a:t>Five conclusions. Input/output devices are a fundamental part of computers. Display technology has progressed from an electron beam to a transistor behind every pixel. Keyboard, mouse and printer have changed little externally, and internally consist of encoders, counters and shift registers. A device reaches the processor through a controller and a bus, and is serviced by polling, interrupts or DMA. And on the kit the entire chain, from a switch to a pixel, can be followed instruction by instruction. The last part of Verm1 follows.
-Learning status, recap. UNDERSTAND NOW: polling, interrupts, DMA; CRT and LCD displays; keyboard and mouse; printers. USE NOW: the complete program, the PRG32 tools (used, not studied, in this course). UNDERSTAND LATER: nothing. A slide without a badge is context: a story, an example, a question, an exercise.
+Learning status, recap. UNDERSTAND NOW: polling, interrupts, DMA; CRT and LCD displays; keyboard and mouse; printers. USE NOW: the complete program, the PRG32 tools (used, not studied, in this course). UNDERSTAND LATER: nothing. A slide without a badge is context: a story, an example, a question, an exercise. Closing thread: Reading the joystick once per frame is polling: simple, and blind between two reads. Next: the finished game. Exit ticket (two to four minutes, alone, on paper): 1. In four steps, how does a laser printer turn a page into toner on paper? Why does a printer have a processor and memory of its own? 2. A game reads the joystick once per frame, at 30 frames per second. A tap lasts 20 ms and falls between two reads. Is it seen? What would an interrupt change?
 For the lecturer: Next: Verm1, part 4: the finished game. Then its publication on the Cartridge Store.</a:t>
             </a:r>
             <a:endParaRPr lang="en-US" dirty="0"/>
